--- a/chapter02/ASE_2_Engineering_Skills.pptx
+++ b/chapter02/ASE_2_Engineering_Skills.pptx
@@ -1,50 +1,50 @@
 
 <file path=ppt/presentation.xml><?xml version="1.0" encoding="utf-8"?>
-<p:presentation xmlns:a="http://schemas.openxmlformats.org/drawingml/2006/main" xmlns:r="http://schemas.openxmlformats.org/officeDocument/2006/relationships" xmlns:p="http://schemas.openxmlformats.org/presentationml/2006/main" saveSubsetFonts="1">
+<p:presentation xmlns:a="http://schemas.openxmlformats.org/drawingml/2006/main" xmlns:r="http://schemas.openxmlformats.org/officeDocument/2006/relationships" xmlns:p="http://schemas.openxmlformats.org/presentationml/2006/main">
   <p:sldMasterIdLst>
-    <p:sldMasterId id="2147483741" r:id="rId4"/>
+    <p:sldMasterId id="2147483648" r:id="rId1"/>
   </p:sldMasterIdLst>
   <p:notesMasterIdLst>
-    <p:notesMasterId r:id="rId42"/>
+    <p:notesMasterId r:id="rId9"/>
   </p:notesMasterIdLst>
   <p:sldIdLst>
-    <p:sldId id="261" r:id="rId5"/>
-    <p:sldId id="275" r:id="rId6"/>
-    <p:sldId id="277" r:id="rId7"/>
-    <p:sldId id="264" r:id="rId8"/>
-    <p:sldId id="265" r:id="rId9"/>
-    <p:sldId id="259" r:id="rId10"/>
-    <p:sldId id="260" r:id="rId11"/>
-    <p:sldId id="263" r:id="rId12"/>
-    <p:sldId id="271" r:id="rId13"/>
-    <p:sldId id="272" r:id="rId14"/>
-    <p:sldId id="278" r:id="rId15"/>
-    <p:sldId id="279" r:id="rId16"/>
-    <p:sldId id="273" r:id="rId17"/>
-    <p:sldId id="266" r:id="rId18"/>
-    <p:sldId id="276" r:id="rId19"/>
-    <p:sldId id="267" r:id="rId20"/>
-    <p:sldId id="258" r:id="rId21"/>
-    <p:sldId id="268" r:id="rId22"/>
-    <p:sldId id="257" r:id="rId23"/>
-    <p:sldId id="269" r:id="rId24"/>
-    <p:sldId id="274" r:id="rId25"/>
-    <p:sldId id="281" r:id="rId26"/>
-    <p:sldId id="280" r:id="rId27"/>
-    <p:sldId id="312" r:id="rId28"/>
-    <p:sldId id="313" r:id="rId29"/>
-    <p:sldId id="270" r:id="rId30"/>
-    <p:sldId id="302" r:id="rId31"/>
-    <p:sldId id="303" r:id="rId32"/>
-    <p:sldId id="304" r:id="rId33"/>
-    <p:sldId id="305" r:id="rId34"/>
-    <p:sldId id="306" r:id="rId35"/>
-    <p:sldId id="307" r:id="rId36"/>
-    <p:sldId id="308" r:id="rId37"/>
-    <p:sldId id="309" r:id="rId38"/>
-    <p:sldId id="311" r:id="rId39"/>
-    <p:sldId id="310" r:id="rId40"/>
-    <p:sldId id="374" r:id="rId41"/>
+    <p:sldId id="261" r:id="rId3"/>
+    <p:sldId id="275" r:id="rId4"/>
+    <p:sldId id="277" r:id="rId5"/>
+    <p:sldId id="264" r:id="rId6"/>
+    <p:sldId id="265" r:id="rId7"/>
+    <p:sldId id="259" r:id="rId8"/>
+    <p:sldId id="260" r:id="rId10"/>
+    <p:sldId id="263" r:id="rId11"/>
+    <p:sldId id="271" r:id="rId12"/>
+    <p:sldId id="272" r:id="rId13"/>
+    <p:sldId id="278" r:id="rId14"/>
+    <p:sldId id="279" r:id="rId15"/>
+    <p:sldId id="273" r:id="rId16"/>
+    <p:sldId id="266" r:id="rId17"/>
+    <p:sldId id="276" r:id="rId18"/>
+    <p:sldId id="267" r:id="rId19"/>
+    <p:sldId id="258" r:id="rId20"/>
+    <p:sldId id="268" r:id="rId21"/>
+    <p:sldId id="257" r:id="rId22"/>
+    <p:sldId id="269" r:id="rId23"/>
+    <p:sldId id="274" r:id="rId24"/>
+    <p:sldId id="281" r:id="rId25"/>
+    <p:sldId id="280" r:id="rId26"/>
+    <p:sldId id="312" r:id="rId27"/>
+    <p:sldId id="313" r:id="rId28"/>
+    <p:sldId id="270" r:id="rId29"/>
+    <p:sldId id="302" r:id="rId30"/>
+    <p:sldId id="303" r:id="rId31"/>
+    <p:sldId id="304" r:id="rId32"/>
+    <p:sldId id="305" r:id="rId33"/>
+    <p:sldId id="306" r:id="rId34"/>
+    <p:sldId id="307" r:id="rId35"/>
+    <p:sldId id="308" r:id="rId36"/>
+    <p:sldId id="309" r:id="rId37"/>
+    <p:sldId id="311" r:id="rId38"/>
+    <p:sldId id="310" r:id="rId39"/>
+    <p:sldId id="374" r:id="rId40"/>
   </p:sldIdLst>
   <p:sldSz cx="12192000" cy="6858000"/>
   <p:notesSz cx="6858000" cy="9144000"/>
@@ -192,1074 +192,6 @@
 </p:presentation>
 </file>
 
-<file path=ppt/revisionInfo.xml><?xml version="1.0" encoding="utf-8"?>
-<p1510:revInfo xmlns:a="http://schemas.openxmlformats.org/drawingml/2006/main" xmlns:r="http://schemas.openxmlformats.org/officeDocument/2006/relationships" xmlns:p1510="http://schemas.microsoft.com/office/powerpoint/2015/10/main">
-  <p1510:revLst>
-    <p1510:client id="{778777A9-BF8E-46F6-9199-CD229551CBD5}" v="736" dt="2018-10-08T05:55:52.588"/>
-  </p1510:revLst>
-</p1510:revInfo>
-</file>
-
-<file path=ppt/changesInfos/changesInfo1.xml><?xml version="1.0" encoding="utf-8"?>
-<pc:chgInfo xmlns:a="http://schemas.openxmlformats.org/drawingml/2006/main" xmlns:r="http://schemas.openxmlformats.org/officeDocument/2006/relationships" xmlns:ac="http://schemas.microsoft.com/office/drawing/2013/main/command" xmlns:pc="http://schemas.microsoft.com/office/powerpoint/2013/main/command">
-  <pc:docChgLst>
-    <pc:chgData name="Xin Zou" userId="260b9726081dae15" providerId="LiveId" clId="{778777A9-BF8E-46F6-9199-CD229551CBD5}"/>
-    <pc:docChg chg="undo custSel addSld delSld modSld modMainMaster">
-      <pc:chgData name="Xin Zou" userId="260b9726081dae15" providerId="LiveId" clId="{778777A9-BF8E-46F6-9199-CD229551CBD5}" dt="2018-10-08T05:55:52.587" v="3502"/>
-      <pc:docMkLst>
-        <pc:docMk/>
-      </pc:docMkLst>
-      <pc:sldChg chg="modSp">
-        <pc:chgData name="Xin Zou" userId="260b9726081dae15" providerId="LiveId" clId="{778777A9-BF8E-46F6-9199-CD229551CBD5}" dt="2018-10-08T05:42:08.746" v="3452"/>
-        <pc:sldMkLst>
-          <pc:docMk/>
-          <pc:sldMk cId="0" sldId="257"/>
-        </pc:sldMkLst>
-        <pc:picChg chg="mod">
-          <ac:chgData name="Xin Zou" userId="260b9726081dae15" providerId="LiveId" clId="{778777A9-BF8E-46F6-9199-CD229551CBD5}" dt="2018-10-08T05:42:08.746" v="3452"/>
-          <ac:picMkLst>
-            <pc:docMk/>
-            <pc:sldMk cId="0" sldId="257"/>
-            <ac:picMk id="11267" creationId="{00000000-0000-0000-0000-000000000000}"/>
-          </ac:picMkLst>
-        </pc:picChg>
-      </pc:sldChg>
-      <pc:sldChg chg="modSp">
-        <pc:chgData name="Xin Zou" userId="260b9726081dae15" providerId="LiveId" clId="{778777A9-BF8E-46F6-9199-CD229551CBD5}" dt="2018-10-08T05:42:08.746" v="3452"/>
-        <pc:sldMkLst>
-          <pc:docMk/>
-          <pc:sldMk cId="0" sldId="258"/>
-        </pc:sldMkLst>
-        <pc:picChg chg="mod">
-          <ac:chgData name="Xin Zou" userId="260b9726081dae15" providerId="LiveId" clId="{778777A9-BF8E-46F6-9199-CD229551CBD5}" dt="2018-10-08T05:42:08.746" v="3452"/>
-          <ac:picMkLst>
-            <pc:docMk/>
-            <pc:sldMk cId="0" sldId="258"/>
-            <ac:picMk id="10243" creationId="{00000000-0000-0000-0000-000000000000}"/>
-          </ac:picMkLst>
-        </pc:picChg>
-      </pc:sldChg>
-      <pc:sldChg chg="modSp">
-        <pc:chgData name="Xin Zou" userId="260b9726081dae15" providerId="LiveId" clId="{778777A9-BF8E-46F6-9199-CD229551CBD5}" dt="2018-10-08T05:42:29.315" v="3474" actId="27636"/>
-        <pc:sldMkLst>
-          <pc:docMk/>
-          <pc:sldMk cId="0" sldId="259"/>
-        </pc:sldMkLst>
-        <pc:spChg chg="mod">
-          <ac:chgData name="Xin Zou" userId="260b9726081dae15" providerId="LiveId" clId="{778777A9-BF8E-46F6-9199-CD229551CBD5}" dt="2018-10-03T20:55:55.338" v="534"/>
-          <ac:spMkLst>
-            <pc:docMk/>
-            <pc:sldMk cId="0" sldId="259"/>
-            <ac:spMk id="7170" creationId="{00000000-0000-0000-0000-000000000000}"/>
-          </ac:spMkLst>
-        </pc:spChg>
-        <pc:spChg chg="mod">
-          <ac:chgData name="Xin Zou" userId="260b9726081dae15" providerId="LiveId" clId="{778777A9-BF8E-46F6-9199-CD229551CBD5}" dt="2018-10-08T05:42:29.315" v="3474" actId="27636"/>
-          <ac:spMkLst>
-            <pc:docMk/>
-            <pc:sldMk cId="0" sldId="259"/>
-            <ac:spMk id="7171" creationId="{00000000-0000-0000-0000-000000000000}"/>
-          </ac:spMkLst>
-        </pc:spChg>
-      </pc:sldChg>
-      <pc:sldChg chg="modSp">
-        <pc:chgData name="Xin Zou" userId="260b9726081dae15" providerId="LiveId" clId="{778777A9-BF8E-46F6-9199-CD229551CBD5}" dt="2018-10-03T20:59:01.867" v="981"/>
-        <pc:sldMkLst>
-          <pc:docMk/>
-          <pc:sldMk cId="0" sldId="260"/>
-        </pc:sldMkLst>
-        <pc:spChg chg="mod">
-          <ac:chgData name="Xin Zou" userId="260b9726081dae15" providerId="LiveId" clId="{778777A9-BF8E-46F6-9199-CD229551CBD5}" dt="2018-10-03T20:57:40.725" v="807"/>
-          <ac:spMkLst>
-            <pc:docMk/>
-            <pc:sldMk cId="0" sldId="260"/>
-            <ac:spMk id="8194" creationId="{00000000-0000-0000-0000-000000000000}"/>
-          </ac:spMkLst>
-        </pc:spChg>
-        <pc:spChg chg="mod">
-          <ac:chgData name="Xin Zou" userId="260b9726081dae15" providerId="LiveId" clId="{778777A9-BF8E-46F6-9199-CD229551CBD5}" dt="2018-10-03T20:59:01.867" v="981"/>
-          <ac:spMkLst>
-            <pc:docMk/>
-            <pc:sldMk cId="0" sldId="260"/>
-            <ac:spMk id="8195" creationId="{00000000-0000-0000-0000-000000000000}"/>
-          </ac:spMkLst>
-        </pc:spChg>
-      </pc:sldChg>
-      <pc:sldChg chg="modSp">
-        <pc:chgData name="Xin Zou" userId="260b9726081dae15" providerId="LiveId" clId="{778777A9-BF8E-46F6-9199-CD229551CBD5}" dt="2018-10-08T05:55:52.587" v="3502"/>
-        <pc:sldMkLst>
-          <pc:docMk/>
-          <pc:sldMk cId="0" sldId="261"/>
-        </pc:sldMkLst>
-        <pc:spChg chg="mod">
-          <ac:chgData name="Xin Zou" userId="260b9726081dae15" providerId="LiveId" clId="{778777A9-BF8E-46F6-9199-CD229551CBD5}" dt="2018-10-08T05:55:52.587" v="3502"/>
-          <ac:spMkLst>
-            <pc:docMk/>
-            <pc:sldMk cId="0" sldId="261"/>
-            <ac:spMk id="6146" creationId="{00000000-0000-0000-0000-000000000000}"/>
-          </ac:spMkLst>
-        </pc:spChg>
-        <pc:spChg chg="mod">
-          <ac:chgData name="Xin Zou" userId="260b9726081dae15" providerId="LiveId" clId="{778777A9-BF8E-46F6-9199-CD229551CBD5}" dt="2018-10-08T05:55:43.840" v="3486"/>
-          <ac:spMkLst>
-            <pc:docMk/>
-            <pc:sldMk cId="0" sldId="261"/>
-            <ac:spMk id="6147" creationId="{00000000-0000-0000-0000-000000000000}"/>
-          </ac:spMkLst>
-        </pc:spChg>
-      </pc:sldChg>
-      <pc:sldChg chg="modSp">
-        <pc:chgData name="Xin Zou" userId="260b9726081dae15" providerId="LiveId" clId="{778777A9-BF8E-46F6-9199-CD229551CBD5}" dt="2018-10-08T05:42:29.364" v="3475" actId="27636"/>
-        <pc:sldMkLst>
-          <pc:docMk/>
-          <pc:sldMk cId="0" sldId="263"/>
-        </pc:sldMkLst>
-        <pc:spChg chg="mod">
-          <ac:chgData name="Xin Zou" userId="260b9726081dae15" providerId="LiveId" clId="{778777A9-BF8E-46F6-9199-CD229551CBD5}" dt="2018-10-08T05:42:29.364" v="3475" actId="27636"/>
-          <ac:spMkLst>
-            <pc:docMk/>
-            <pc:sldMk cId="0" sldId="263"/>
-            <ac:spMk id="9219" creationId="{00000000-0000-0000-0000-000000000000}"/>
-          </ac:spMkLst>
-        </pc:spChg>
-      </pc:sldChg>
-      <pc:sldChg chg="modSp">
-        <pc:chgData name="Xin Zou" userId="260b9726081dae15" providerId="LiveId" clId="{778777A9-BF8E-46F6-9199-CD229551CBD5}" dt="2018-10-08T05:42:09.211" v="3454" actId="27636"/>
-        <pc:sldMkLst>
-          <pc:docMk/>
-          <pc:sldMk cId="3087338762" sldId="264"/>
-        </pc:sldMkLst>
-        <pc:spChg chg="mod">
-          <ac:chgData name="Xin Zou" userId="260b9726081dae15" providerId="LiveId" clId="{778777A9-BF8E-46F6-9199-CD229551CBD5}" dt="2018-10-08T05:42:09.211" v="3454" actId="27636"/>
-          <ac:spMkLst>
-            <pc:docMk/>
-            <pc:sldMk cId="3087338762" sldId="264"/>
-            <ac:spMk id="2" creationId="{00000000-0000-0000-0000-000000000000}"/>
-          </ac:spMkLst>
-        </pc:spChg>
-        <pc:graphicFrameChg chg="mod">
-          <ac:chgData name="Xin Zou" userId="260b9726081dae15" providerId="LiveId" clId="{778777A9-BF8E-46F6-9199-CD229551CBD5}" dt="2018-10-08T05:42:08.746" v="3452"/>
-          <ac:graphicFrameMkLst>
-            <pc:docMk/>
-            <pc:sldMk cId="3087338762" sldId="264"/>
-            <ac:graphicFrameMk id="4" creationId="{00000000-0000-0000-0000-000000000000}"/>
-          </ac:graphicFrameMkLst>
-        </pc:graphicFrameChg>
-      </pc:sldChg>
-      <pc:sldChg chg="modSp">
-        <pc:chgData name="Xin Zou" userId="260b9726081dae15" providerId="LiveId" clId="{778777A9-BF8E-46F6-9199-CD229551CBD5}" dt="2018-10-08T05:42:29.296" v="3473" actId="27636"/>
-        <pc:sldMkLst>
-          <pc:docMk/>
-          <pc:sldMk cId="764867859" sldId="265"/>
-        </pc:sldMkLst>
-        <pc:spChg chg="mod">
-          <ac:chgData name="Xin Zou" userId="260b9726081dae15" providerId="LiveId" clId="{778777A9-BF8E-46F6-9199-CD229551CBD5}" dt="2018-10-03T20:53:02.653" v="334"/>
-          <ac:spMkLst>
-            <pc:docMk/>
-            <pc:sldMk cId="764867859" sldId="265"/>
-            <ac:spMk id="2" creationId="{00000000-0000-0000-0000-000000000000}"/>
-          </ac:spMkLst>
-        </pc:spChg>
-        <pc:spChg chg="mod">
-          <ac:chgData name="Xin Zou" userId="260b9726081dae15" providerId="LiveId" clId="{778777A9-BF8E-46F6-9199-CD229551CBD5}" dt="2018-10-08T05:42:29.296" v="3473" actId="27636"/>
-          <ac:spMkLst>
-            <pc:docMk/>
-            <pc:sldMk cId="764867859" sldId="265"/>
-            <ac:spMk id="3" creationId="{00000000-0000-0000-0000-000000000000}"/>
-          </ac:spMkLst>
-        </pc:spChg>
-      </pc:sldChg>
-      <pc:sldChg chg="modSp">
-        <pc:chgData name="Xin Zou" userId="260b9726081dae15" providerId="LiveId" clId="{778777A9-BF8E-46F6-9199-CD229551CBD5}" dt="2018-10-08T05:42:08.746" v="3452"/>
-        <pc:sldMkLst>
-          <pc:docMk/>
-          <pc:sldMk cId="2880097445" sldId="267"/>
-        </pc:sldMkLst>
-        <pc:spChg chg="mod">
-          <ac:chgData name="Xin Zou" userId="260b9726081dae15" providerId="LiveId" clId="{778777A9-BF8E-46F6-9199-CD229551CBD5}" dt="2018-10-08T05:42:08.746" v="3452"/>
-          <ac:spMkLst>
-            <pc:docMk/>
-            <pc:sldMk cId="2880097445" sldId="267"/>
-            <ac:spMk id="3" creationId="{00000000-0000-0000-0000-000000000000}"/>
-          </ac:spMkLst>
-        </pc:spChg>
-        <pc:picChg chg="mod">
-          <ac:chgData name="Xin Zou" userId="260b9726081dae15" providerId="LiveId" clId="{778777A9-BF8E-46F6-9199-CD229551CBD5}" dt="2018-10-08T05:42:08.746" v="3452"/>
-          <ac:picMkLst>
-            <pc:docMk/>
-            <pc:sldMk cId="2880097445" sldId="267"/>
-            <ac:picMk id="1026" creationId="{00000000-0000-0000-0000-000000000000}"/>
-          </ac:picMkLst>
-        </pc:picChg>
-        <pc:picChg chg="mod">
-          <ac:chgData name="Xin Zou" userId="260b9726081dae15" providerId="LiveId" clId="{778777A9-BF8E-46F6-9199-CD229551CBD5}" dt="2018-10-08T05:42:08.746" v="3452"/>
-          <ac:picMkLst>
-            <pc:docMk/>
-            <pc:sldMk cId="2880097445" sldId="267"/>
-            <ac:picMk id="1028" creationId="{00000000-0000-0000-0000-000000000000}"/>
-          </ac:picMkLst>
-        </pc:picChg>
-      </pc:sldChg>
-      <pc:sldChg chg="modSp">
-        <pc:chgData name="Xin Zou" userId="260b9726081dae15" providerId="LiveId" clId="{778777A9-BF8E-46F6-9199-CD229551CBD5}" dt="2018-10-08T05:42:29.475" v="3478" actId="27636"/>
-        <pc:sldMkLst>
-          <pc:docMk/>
-          <pc:sldMk cId="1709060020" sldId="268"/>
-        </pc:sldMkLst>
-        <pc:spChg chg="mod">
-          <ac:chgData name="Xin Zou" userId="260b9726081dae15" providerId="LiveId" clId="{778777A9-BF8E-46F6-9199-CD229551CBD5}" dt="2018-10-08T05:42:29.475" v="3478" actId="27636"/>
-          <ac:spMkLst>
-            <pc:docMk/>
-            <pc:sldMk cId="1709060020" sldId="268"/>
-            <ac:spMk id="3" creationId="{00000000-0000-0000-0000-000000000000}"/>
-          </ac:spMkLst>
-        </pc:spChg>
-      </pc:sldChg>
-      <pc:sldChg chg="modSp">
-        <pc:chgData name="Xin Zou" userId="260b9726081dae15" providerId="LiveId" clId="{778777A9-BF8E-46F6-9199-CD229551CBD5}" dt="2018-10-08T05:42:29.503" v="3479" actId="27636"/>
-        <pc:sldMkLst>
-          <pc:docMk/>
-          <pc:sldMk cId="2157884989" sldId="270"/>
-        </pc:sldMkLst>
-        <pc:spChg chg="mod">
-          <ac:chgData name="Xin Zou" userId="260b9726081dae15" providerId="LiveId" clId="{778777A9-BF8E-46F6-9199-CD229551CBD5}" dt="2018-10-03T21:51:13.251" v="2758" actId="6549"/>
-          <ac:spMkLst>
-            <pc:docMk/>
-            <pc:sldMk cId="2157884989" sldId="270"/>
-            <ac:spMk id="2" creationId="{00000000-0000-0000-0000-000000000000}"/>
-          </ac:spMkLst>
-        </pc:spChg>
-        <pc:spChg chg="mod">
-          <ac:chgData name="Xin Zou" userId="260b9726081dae15" providerId="LiveId" clId="{778777A9-BF8E-46F6-9199-CD229551CBD5}" dt="2018-10-08T05:42:29.503" v="3479" actId="27636"/>
-          <ac:spMkLst>
-            <pc:docMk/>
-            <pc:sldMk cId="2157884989" sldId="270"/>
-            <ac:spMk id="3" creationId="{00000000-0000-0000-0000-000000000000}"/>
-          </ac:spMkLst>
-        </pc:spChg>
-      </pc:sldChg>
-      <pc:sldChg chg="modSp">
-        <pc:chgData name="Xin Zou" userId="260b9726081dae15" providerId="LiveId" clId="{778777A9-BF8E-46F6-9199-CD229551CBD5}" dt="2018-10-08T05:42:09.310" v="3457" actId="27636"/>
-        <pc:sldMkLst>
-          <pc:docMk/>
-          <pc:sldMk cId="4070175085" sldId="271"/>
-        </pc:sldMkLst>
-        <pc:spChg chg="mod">
-          <ac:chgData name="Xin Zou" userId="260b9726081dae15" providerId="LiveId" clId="{778777A9-BF8E-46F6-9199-CD229551CBD5}" dt="2018-10-08T05:42:09.310" v="3457" actId="27636"/>
-          <ac:spMkLst>
-            <pc:docMk/>
-            <pc:sldMk cId="4070175085" sldId="271"/>
-            <ac:spMk id="2" creationId="{00000000-0000-0000-0000-000000000000}"/>
-          </ac:spMkLst>
-        </pc:spChg>
-      </pc:sldChg>
-      <pc:sldChg chg="modSp">
-        <pc:chgData name="Xin Zou" userId="260b9726081dae15" providerId="LiveId" clId="{778777A9-BF8E-46F6-9199-CD229551CBD5}" dt="2018-10-08T05:42:29.404" v="3476" actId="27636"/>
-        <pc:sldMkLst>
-          <pc:docMk/>
-          <pc:sldMk cId="48979433" sldId="273"/>
-        </pc:sldMkLst>
-        <pc:spChg chg="mod">
-          <ac:chgData name="Xin Zou" userId="260b9726081dae15" providerId="LiveId" clId="{778777A9-BF8E-46F6-9199-CD229551CBD5}" dt="2018-10-03T21:07:16.908" v="1871" actId="27636"/>
-          <ac:spMkLst>
-            <pc:docMk/>
-            <pc:sldMk cId="48979433" sldId="273"/>
-            <ac:spMk id="2" creationId="{00000000-0000-0000-0000-000000000000}"/>
-          </ac:spMkLst>
-        </pc:spChg>
-        <pc:spChg chg="mod">
-          <ac:chgData name="Xin Zou" userId="260b9726081dae15" providerId="LiveId" clId="{778777A9-BF8E-46F6-9199-CD229551CBD5}" dt="2018-10-08T05:42:29.404" v="3476" actId="27636"/>
-          <ac:spMkLst>
-            <pc:docMk/>
-            <pc:sldMk cId="48979433" sldId="273"/>
-            <ac:spMk id="3" creationId="{00000000-0000-0000-0000-000000000000}"/>
-          </ac:spMkLst>
-        </pc:spChg>
-      </pc:sldChg>
-      <pc:sldChg chg="addSp delSp modSp">
-        <pc:chgData name="Xin Zou" userId="260b9726081dae15" providerId="LiveId" clId="{778777A9-BF8E-46F6-9199-CD229551CBD5}" dt="2018-10-08T05:42:08.746" v="3452"/>
-        <pc:sldMkLst>
-          <pc:docMk/>
-          <pc:sldMk cId="2284784455" sldId="274"/>
-        </pc:sldMkLst>
-        <pc:spChg chg="del mod">
-          <ac:chgData name="Xin Zou" userId="260b9726081dae15" providerId="LiveId" clId="{778777A9-BF8E-46F6-9199-CD229551CBD5}" dt="2018-10-03T21:53:04.755" v="2771"/>
-          <ac:spMkLst>
-            <pc:docMk/>
-            <pc:sldMk cId="2284784455" sldId="274"/>
-            <ac:spMk id="3" creationId="{00000000-0000-0000-0000-000000000000}"/>
-          </ac:spMkLst>
-        </pc:spChg>
-        <pc:picChg chg="add mod">
-          <ac:chgData name="Xin Zou" userId="260b9726081dae15" providerId="LiveId" clId="{778777A9-BF8E-46F6-9199-CD229551CBD5}" dt="2018-10-08T05:42:08.746" v="3452"/>
-          <ac:picMkLst>
-            <pc:docMk/>
-            <pc:sldMk cId="2284784455" sldId="274"/>
-            <ac:picMk id="4" creationId="{59E5CAD4-C3A8-4CFB-A997-4E538BA0CEE5}"/>
-          </ac:picMkLst>
-        </pc:picChg>
-      </pc:sldChg>
-      <pc:sldChg chg="modSp">
-        <pc:chgData name="Xin Zou" userId="260b9726081dae15" providerId="LiveId" clId="{778777A9-BF8E-46F6-9199-CD229551CBD5}" dt="2018-10-03T22:10:41.219" v="3023"/>
-        <pc:sldMkLst>
-          <pc:docMk/>
-          <pc:sldMk cId="3934912793" sldId="275"/>
-        </pc:sldMkLst>
-        <pc:spChg chg="mod">
-          <ac:chgData name="Xin Zou" userId="260b9726081dae15" providerId="LiveId" clId="{778777A9-BF8E-46F6-9199-CD229551CBD5}" dt="2018-10-03T22:10:41.219" v="3023"/>
-          <ac:spMkLst>
-            <pc:docMk/>
-            <pc:sldMk cId="3934912793" sldId="275"/>
-            <ac:spMk id="3" creationId="{00000000-0000-0000-0000-000000000000}"/>
-          </ac:spMkLst>
-        </pc:spChg>
-      </pc:sldChg>
-      <pc:sldChg chg="modSp">
-        <pc:chgData name="Xin Zou" userId="260b9726081dae15" providerId="LiveId" clId="{778777A9-BF8E-46F6-9199-CD229551CBD5}" dt="2018-10-08T05:42:29.458" v="3477" actId="27636"/>
-        <pc:sldMkLst>
-          <pc:docMk/>
-          <pc:sldMk cId="3404328805" sldId="276"/>
-        </pc:sldMkLst>
-        <pc:spChg chg="mod">
-          <ac:chgData name="Xin Zou" userId="260b9726081dae15" providerId="LiveId" clId="{778777A9-BF8E-46F6-9199-CD229551CBD5}" dt="2018-10-08T05:42:29.458" v="3477" actId="27636"/>
-          <ac:spMkLst>
-            <pc:docMk/>
-            <pc:sldMk cId="3404328805" sldId="276"/>
-            <ac:spMk id="3" creationId="{00000000-0000-0000-0000-000000000000}"/>
-          </ac:spMkLst>
-        </pc:spChg>
-      </pc:sldChg>
-      <pc:sldChg chg="modSp add">
-        <pc:chgData name="Xin Zou" userId="260b9726081dae15" providerId="LiveId" clId="{778777A9-BF8E-46F6-9199-CD229551CBD5}" dt="2018-10-08T05:42:09.190" v="3453" actId="27636"/>
-        <pc:sldMkLst>
-          <pc:docMk/>
-          <pc:sldMk cId="1069789591" sldId="277"/>
-        </pc:sldMkLst>
-        <pc:spChg chg="mod">
-          <ac:chgData name="Xin Zou" userId="260b9726081dae15" providerId="LiveId" clId="{778777A9-BF8E-46F6-9199-CD229551CBD5}" dt="2018-10-03T20:50:26.835" v="210"/>
-          <ac:spMkLst>
-            <pc:docMk/>
-            <pc:sldMk cId="1069789591" sldId="277"/>
-            <ac:spMk id="2" creationId="{4E632AB6-302C-4E5B-B4AC-F040B3BB09C5}"/>
-          </ac:spMkLst>
-        </pc:spChg>
-        <pc:spChg chg="mod">
-          <ac:chgData name="Xin Zou" userId="260b9726081dae15" providerId="LiveId" clId="{778777A9-BF8E-46F6-9199-CD229551CBD5}" dt="2018-10-08T05:42:09.190" v="3453" actId="27636"/>
-          <ac:spMkLst>
-            <pc:docMk/>
-            <pc:sldMk cId="1069789591" sldId="277"/>
-            <ac:spMk id="3" creationId="{319E3427-6C1F-4AC9-8493-B5E69D68178C}"/>
-          </ac:spMkLst>
-        </pc:spChg>
-      </pc:sldChg>
-      <pc:sldChg chg="modSp add">
-        <pc:chgData name="Xin Zou" userId="260b9726081dae15" providerId="LiveId" clId="{778777A9-BF8E-46F6-9199-CD229551CBD5}" dt="2018-10-08T05:42:09.337" v="3458" actId="27636"/>
-        <pc:sldMkLst>
-          <pc:docMk/>
-          <pc:sldMk cId="730287098" sldId="278"/>
-        </pc:sldMkLst>
-        <pc:spChg chg="mod">
-          <ac:chgData name="Xin Zou" userId="260b9726081dae15" providerId="LiveId" clId="{778777A9-BF8E-46F6-9199-CD229551CBD5}" dt="2018-10-03T21:02:16.019" v="1664"/>
-          <ac:spMkLst>
-            <pc:docMk/>
-            <pc:sldMk cId="730287098" sldId="278"/>
-            <ac:spMk id="2" creationId="{00000000-0000-0000-0000-000000000000}"/>
-          </ac:spMkLst>
-        </pc:spChg>
-        <pc:spChg chg="mod">
-          <ac:chgData name="Xin Zou" userId="260b9726081dae15" providerId="LiveId" clId="{778777A9-BF8E-46F6-9199-CD229551CBD5}" dt="2018-10-08T05:42:09.337" v="3458" actId="27636"/>
-          <ac:spMkLst>
-            <pc:docMk/>
-            <pc:sldMk cId="730287098" sldId="278"/>
-            <ac:spMk id="3" creationId="{00000000-0000-0000-0000-000000000000}"/>
-          </ac:spMkLst>
-        </pc:spChg>
-      </pc:sldChg>
-      <pc:sldChg chg="modSp add">
-        <pc:chgData name="Xin Zou" userId="260b9726081dae15" providerId="LiveId" clId="{778777A9-BF8E-46F6-9199-CD229551CBD5}" dt="2018-10-03T21:05:33.335" v="1818" actId="27636"/>
-        <pc:sldMkLst>
-          <pc:docMk/>
-          <pc:sldMk cId="3705111125" sldId="279"/>
-        </pc:sldMkLst>
-        <pc:spChg chg="mod">
-          <ac:chgData name="Xin Zou" userId="260b9726081dae15" providerId="LiveId" clId="{778777A9-BF8E-46F6-9199-CD229551CBD5}" dt="2018-10-03T21:03:54.730" v="1679" actId="20577"/>
-          <ac:spMkLst>
-            <pc:docMk/>
-            <pc:sldMk cId="3705111125" sldId="279"/>
-            <ac:spMk id="2" creationId="{233A296E-554E-4DA3-87FB-CA91E1F6E59D}"/>
-          </ac:spMkLst>
-        </pc:spChg>
-        <pc:spChg chg="mod">
-          <ac:chgData name="Xin Zou" userId="260b9726081dae15" providerId="LiveId" clId="{778777A9-BF8E-46F6-9199-CD229551CBD5}" dt="2018-10-03T21:05:33.335" v="1818" actId="27636"/>
-          <ac:spMkLst>
-            <pc:docMk/>
-            <pc:sldMk cId="3705111125" sldId="279"/>
-            <ac:spMk id="3" creationId="{9BA4195B-AFAF-4D75-A9F9-A5A4C7DAF27C}"/>
-          </ac:spMkLst>
-        </pc:spChg>
-      </pc:sldChg>
-      <pc:sldChg chg="modSp add">
-        <pc:chgData name="Xin Zou" userId="260b9726081dae15" providerId="LiveId" clId="{778777A9-BF8E-46F6-9199-CD229551CBD5}" dt="2018-10-08T05:42:09.404" v="3460" actId="27636"/>
-        <pc:sldMkLst>
-          <pc:docMk/>
-          <pc:sldMk cId="3658001604" sldId="280"/>
-        </pc:sldMkLst>
-        <pc:spChg chg="mod">
-          <ac:chgData name="Xin Zou" userId="260b9726081dae15" providerId="LiveId" clId="{778777A9-BF8E-46F6-9199-CD229551CBD5}" dt="2018-10-03T21:26:18.257" v="2421"/>
-          <ac:spMkLst>
-            <pc:docMk/>
-            <pc:sldMk cId="3658001604" sldId="280"/>
-            <ac:spMk id="2" creationId="{352B4F0D-4D02-4662-8FA7-4C04BC522248}"/>
-          </ac:spMkLst>
-        </pc:spChg>
-        <pc:spChg chg="mod">
-          <ac:chgData name="Xin Zou" userId="260b9726081dae15" providerId="LiveId" clId="{778777A9-BF8E-46F6-9199-CD229551CBD5}" dt="2018-10-08T05:42:09.404" v="3460" actId="27636"/>
-          <ac:spMkLst>
-            <pc:docMk/>
-            <pc:sldMk cId="3658001604" sldId="280"/>
-            <ac:spMk id="3" creationId="{DC2EB974-3A66-4B23-9533-93BD202F34F7}"/>
-          </ac:spMkLst>
-        </pc:spChg>
-      </pc:sldChg>
-      <pc:sldChg chg="add">
-        <pc:chgData name="Xin Zou" userId="260b9726081dae15" providerId="LiveId" clId="{778777A9-BF8E-46F6-9199-CD229551CBD5}" dt="2018-10-03T21:52:37.457" v="2767"/>
-        <pc:sldMkLst>
-          <pc:docMk/>
-          <pc:sldMk cId="3543712019" sldId="281"/>
-        </pc:sldMkLst>
-      </pc:sldChg>
-      <pc:sldChg chg="modSp add">
-        <pc:chgData name="Xin Zou" userId="260b9726081dae15" providerId="LiveId" clId="{778777A9-BF8E-46F6-9199-CD229551CBD5}" dt="2018-10-08T05:42:29.529" v="3480" actId="27636"/>
-        <pc:sldMkLst>
-          <pc:docMk/>
-          <pc:sldMk cId="860550191" sldId="302"/>
-        </pc:sldMkLst>
-        <pc:spChg chg="mod">
-          <ac:chgData name="Xin Zou" userId="260b9726081dae15" providerId="LiveId" clId="{778777A9-BF8E-46F6-9199-CD229551CBD5}" dt="2018-10-08T05:42:29.529" v="3480" actId="27636"/>
-          <ac:spMkLst>
-            <pc:docMk/>
-            <pc:sldMk cId="860550191" sldId="302"/>
-            <ac:spMk id="3" creationId="{00000000-0000-0000-0000-000000000000}"/>
-          </ac:spMkLst>
-        </pc:spChg>
-      </pc:sldChg>
-      <pc:sldChg chg="add">
-        <pc:chgData name="Xin Zou" userId="260b9726081dae15" providerId="LiveId" clId="{778777A9-BF8E-46F6-9199-CD229551CBD5}" dt="2018-10-03T21:58:32.981" v="2772"/>
-        <pc:sldMkLst>
-          <pc:docMk/>
-          <pc:sldMk cId="560694357" sldId="303"/>
-        </pc:sldMkLst>
-      </pc:sldChg>
-      <pc:sldChg chg="modSp add">
-        <pc:chgData name="Xin Zou" userId="260b9726081dae15" providerId="LiveId" clId="{778777A9-BF8E-46F6-9199-CD229551CBD5}" dt="2018-10-08T05:42:29.547" v="3481" actId="27636"/>
-        <pc:sldMkLst>
-          <pc:docMk/>
-          <pc:sldMk cId="4243110794" sldId="304"/>
-        </pc:sldMkLst>
-        <pc:spChg chg="mod">
-          <ac:chgData name="Xin Zou" userId="260b9726081dae15" providerId="LiveId" clId="{778777A9-BF8E-46F6-9199-CD229551CBD5}" dt="2018-10-08T05:42:29.547" v="3481" actId="27636"/>
-          <ac:spMkLst>
-            <pc:docMk/>
-            <pc:sldMk cId="4243110794" sldId="304"/>
-            <ac:spMk id="3" creationId="{00000000-0000-0000-0000-000000000000}"/>
-          </ac:spMkLst>
-        </pc:spChg>
-      </pc:sldChg>
-      <pc:sldChg chg="add">
-        <pc:chgData name="Xin Zou" userId="260b9726081dae15" providerId="LiveId" clId="{778777A9-BF8E-46F6-9199-CD229551CBD5}" dt="2018-10-03T21:58:32.981" v="2772"/>
-        <pc:sldMkLst>
-          <pc:docMk/>
-          <pc:sldMk cId="544504135" sldId="305"/>
-        </pc:sldMkLst>
-      </pc:sldChg>
-      <pc:sldChg chg="modSp add">
-        <pc:chgData name="Xin Zou" userId="260b9726081dae15" providerId="LiveId" clId="{778777A9-BF8E-46F6-9199-CD229551CBD5}" dt="2018-10-08T05:42:29.577" v="3482" actId="27636"/>
-        <pc:sldMkLst>
-          <pc:docMk/>
-          <pc:sldMk cId="2158645595" sldId="306"/>
-        </pc:sldMkLst>
-        <pc:spChg chg="mod">
-          <ac:chgData name="Xin Zou" userId="260b9726081dae15" providerId="LiveId" clId="{778777A9-BF8E-46F6-9199-CD229551CBD5}" dt="2018-10-08T05:42:29.577" v="3482" actId="27636"/>
-          <ac:spMkLst>
-            <pc:docMk/>
-            <pc:sldMk cId="2158645595" sldId="306"/>
-            <ac:spMk id="3" creationId="{00000000-0000-0000-0000-000000000000}"/>
-          </ac:spMkLst>
-        </pc:spChg>
-      </pc:sldChg>
-      <pc:sldChg chg="modSp add">
-        <pc:chgData name="Xin Zou" userId="260b9726081dae15" providerId="LiveId" clId="{778777A9-BF8E-46F6-9199-CD229551CBD5}" dt="2018-10-08T05:42:29.609" v="3483" actId="27636"/>
-        <pc:sldMkLst>
-          <pc:docMk/>
-          <pc:sldMk cId="3599711863" sldId="307"/>
-        </pc:sldMkLst>
-        <pc:spChg chg="mod">
-          <ac:chgData name="Xin Zou" userId="260b9726081dae15" providerId="LiveId" clId="{778777A9-BF8E-46F6-9199-CD229551CBD5}" dt="2018-10-08T05:42:29.609" v="3483" actId="27636"/>
-          <ac:spMkLst>
-            <pc:docMk/>
-            <pc:sldMk cId="3599711863" sldId="307"/>
-            <ac:spMk id="3" creationId="{00000000-0000-0000-0000-000000000000}"/>
-          </ac:spMkLst>
-        </pc:spChg>
-      </pc:sldChg>
-      <pc:sldChg chg="modSp add">
-        <pc:chgData name="Xin Zou" userId="260b9726081dae15" providerId="LiveId" clId="{778777A9-BF8E-46F6-9199-CD229551CBD5}" dt="2018-10-08T05:42:29.640" v="3484" actId="27636"/>
-        <pc:sldMkLst>
-          <pc:docMk/>
-          <pc:sldMk cId="2204531274" sldId="308"/>
-        </pc:sldMkLst>
-        <pc:spChg chg="mod">
-          <ac:chgData name="Xin Zou" userId="260b9726081dae15" providerId="LiveId" clId="{778777A9-BF8E-46F6-9199-CD229551CBD5}" dt="2018-10-08T05:42:29.640" v="3484" actId="27636"/>
-          <ac:spMkLst>
-            <pc:docMk/>
-            <pc:sldMk cId="2204531274" sldId="308"/>
-            <ac:spMk id="3" creationId="{00000000-0000-0000-0000-000000000000}"/>
-          </ac:spMkLst>
-        </pc:spChg>
-      </pc:sldChg>
-      <pc:sldChg chg="add">
-        <pc:chgData name="Xin Zou" userId="260b9726081dae15" providerId="LiveId" clId="{778777A9-BF8E-46F6-9199-CD229551CBD5}" dt="2018-10-03T21:58:32.981" v="2772"/>
-        <pc:sldMkLst>
-          <pc:docMk/>
-          <pc:sldMk cId="2629546331" sldId="309"/>
-        </pc:sldMkLst>
-      </pc:sldChg>
-      <pc:sldChg chg="modSp add">
-        <pc:chgData name="Xin Zou" userId="260b9726081dae15" providerId="LiveId" clId="{778777A9-BF8E-46F6-9199-CD229551CBD5}" dt="2018-10-08T05:42:29.184" v="3471" actId="27636"/>
-        <pc:sldMkLst>
-          <pc:docMk/>
-          <pc:sldMk cId="2335214187" sldId="310"/>
-        </pc:sldMkLst>
-        <pc:spChg chg="mod">
-          <ac:chgData name="Xin Zou" userId="260b9726081dae15" providerId="LiveId" clId="{778777A9-BF8E-46F6-9199-CD229551CBD5}" dt="2018-10-08T05:42:29.184" v="3471" actId="27636"/>
-          <ac:spMkLst>
-            <pc:docMk/>
-            <pc:sldMk cId="2335214187" sldId="310"/>
-            <ac:spMk id="3" creationId="{00000000-0000-0000-0000-000000000000}"/>
-          </ac:spMkLst>
-        </pc:spChg>
-      </pc:sldChg>
-      <pc:sldChg chg="modSp add">
-        <pc:chgData name="Xin Zou" userId="260b9726081dae15" providerId="LiveId" clId="{778777A9-BF8E-46F6-9199-CD229551CBD5}" dt="2018-10-03T22:59:49.819" v="3368" actId="27636"/>
-        <pc:sldMkLst>
-          <pc:docMk/>
-          <pc:sldMk cId="3835943848" sldId="311"/>
-        </pc:sldMkLst>
-        <pc:spChg chg="mod">
-          <ac:chgData name="Xin Zou" userId="260b9726081dae15" providerId="LiveId" clId="{778777A9-BF8E-46F6-9199-CD229551CBD5}" dt="2018-10-03T22:09:22.671" v="2938"/>
-          <ac:spMkLst>
-            <pc:docMk/>
-            <pc:sldMk cId="3835943848" sldId="311"/>
-            <ac:spMk id="2" creationId="{6823FD1C-C9B8-4686-993C-09C907A9E5AE}"/>
-          </ac:spMkLst>
-        </pc:spChg>
-        <pc:spChg chg="mod">
-          <ac:chgData name="Xin Zou" userId="260b9726081dae15" providerId="LiveId" clId="{778777A9-BF8E-46F6-9199-CD229551CBD5}" dt="2018-10-03T22:59:49.819" v="3368" actId="27636"/>
-          <ac:spMkLst>
-            <pc:docMk/>
-            <pc:sldMk cId="3835943848" sldId="311"/>
-            <ac:spMk id="3" creationId="{79F7FFF7-9B28-457C-92C6-76AE710E49E2}"/>
-          </ac:spMkLst>
-        </pc:spChg>
-      </pc:sldChg>
-      <pc:sldChg chg="addSp delSp modSp add">
-        <pc:chgData name="Xin Zou" userId="260b9726081dae15" providerId="LiveId" clId="{778777A9-BF8E-46F6-9199-CD229551CBD5}" dt="2018-10-08T05:42:08.746" v="3452"/>
-        <pc:sldMkLst>
-          <pc:docMk/>
-          <pc:sldMk cId="489024021" sldId="312"/>
-        </pc:sldMkLst>
-        <pc:spChg chg="mod">
-          <ac:chgData name="Xin Zou" userId="260b9726081dae15" providerId="LiveId" clId="{778777A9-BF8E-46F6-9199-CD229551CBD5}" dt="2018-10-03T22:14:35.118" v="3167"/>
-          <ac:spMkLst>
-            <pc:docMk/>
-            <pc:sldMk cId="489024021" sldId="312"/>
-            <ac:spMk id="2" creationId="{400A2DE7-47A0-4F20-9694-FDBF92C1CA35}"/>
-          </ac:spMkLst>
-        </pc:spChg>
-        <pc:spChg chg="del">
-          <ac:chgData name="Xin Zou" userId="260b9726081dae15" providerId="LiveId" clId="{778777A9-BF8E-46F6-9199-CD229551CBD5}" dt="2018-10-03T22:13:57.347" v="3031"/>
-          <ac:spMkLst>
-            <pc:docMk/>
-            <pc:sldMk cId="489024021" sldId="312"/>
-            <ac:spMk id="3" creationId="{C6C61FAE-646B-4568-A5D4-04ACA706FF1F}"/>
-          </ac:spMkLst>
-        </pc:spChg>
-        <pc:picChg chg="add mod">
-          <ac:chgData name="Xin Zou" userId="260b9726081dae15" providerId="LiveId" clId="{778777A9-BF8E-46F6-9199-CD229551CBD5}" dt="2018-10-08T05:42:08.746" v="3452"/>
-          <ac:picMkLst>
-            <pc:docMk/>
-            <pc:sldMk cId="489024021" sldId="312"/>
-            <ac:picMk id="4" creationId="{32760238-1EA2-49A3-9253-B9847E0F9086}"/>
-          </ac:picMkLst>
-        </pc:picChg>
-      </pc:sldChg>
-      <pc:sldChg chg="addSp delSp modSp add">
-        <pc:chgData name="Xin Zou" userId="260b9726081dae15" providerId="LiveId" clId="{778777A9-BF8E-46F6-9199-CD229551CBD5}" dt="2018-10-08T05:42:09.413" v="3461" actId="27636"/>
-        <pc:sldMkLst>
-          <pc:docMk/>
-          <pc:sldMk cId="2964863537" sldId="313"/>
-        </pc:sldMkLst>
-        <pc:spChg chg="mod">
-          <ac:chgData name="Xin Zou" userId="260b9726081dae15" providerId="LiveId" clId="{778777A9-BF8E-46F6-9199-CD229551CBD5}" dt="2018-10-08T05:42:09.413" v="3461" actId="27636"/>
-          <ac:spMkLst>
-            <pc:docMk/>
-            <pc:sldMk cId="2964863537" sldId="313"/>
-            <ac:spMk id="2" creationId="{AD08DCBC-EDDB-4DAF-87EF-58148CE82072}"/>
-          </ac:spMkLst>
-        </pc:spChg>
-        <pc:spChg chg="del">
-          <ac:chgData name="Xin Zou" userId="260b9726081dae15" providerId="LiveId" clId="{778777A9-BF8E-46F6-9199-CD229551CBD5}" dt="2018-10-03T22:56:14.400" v="3188"/>
-          <ac:spMkLst>
-            <pc:docMk/>
-            <pc:sldMk cId="2964863537" sldId="313"/>
-            <ac:spMk id="3" creationId="{8B2F8391-D837-4430-8084-F233A52C113D}"/>
-          </ac:spMkLst>
-        </pc:spChg>
-        <pc:picChg chg="add mod">
-          <ac:chgData name="Xin Zou" userId="260b9726081dae15" providerId="LiveId" clId="{778777A9-BF8E-46F6-9199-CD229551CBD5}" dt="2018-10-08T05:42:08.746" v="3452"/>
-          <ac:picMkLst>
-            <pc:docMk/>
-            <pc:sldMk cId="2964863537" sldId="313"/>
-            <ac:picMk id="4" creationId="{FEC41A83-D234-47DB-9792-60B41F1B703A}"/>
-          </ac:picMkLst>
-        </pc:picChg>
-      </pc:sldChg>
-      <pc:sldChg chg="add del">
-        <pc:chgData name="Xin Zou" userId="260b9726081dae15" providerId="LiveId" clId="{778777A9-BF8E-46F6-9199-CD229551CBD5}" dt="2018-10-08T05:42:24.686" v="3470"/>
-        <pc:sldMkLst>
-          <pc:docMk/>
-          <pc:sldMk cId="161325156" sldId="374"/>
-        </pc:sldMkLst>
-      </pc:sldChg>
-      <pc:sldMasterChg chg="modSp modSldLayout">
-        <pc:chgData name="Xin Zou" userId="260b9726081dae15" providerId="LiveId" clId="{778777A9-BF8E-46F6-9199-CD229551CBD5}" dt="2018-10-08T05:42:08.746" v="3452"/>
-        <pc:sldMasterMkLst>
-          <pc:docMk/>
-          <pc:sldMasterMk cId="254589341" sldId="2147483729"/>
-        </pc:sldMasterMkLst>
-        <pc:spChg chg="mod">
-          <ac:chgData name="Xin Zou" userId="260b9726081dae15" providerId="LiveId" clId="{778777A9-BF8E-46F6-9199-CD229551CBD5}" dt="2018-10-08T05:42:08.746" v="3452"/>
-          <ac:spMkLst>
-            <pc:docMk/>
-            <pc:sldMasterMk cId="254589341" sldId="2147483729"/>
-            <ac:spMk id="2" creationId="{00000000-0000-0000-0000-000000000000}"/>
-          </ac:spMkLst>
-        </pc:spChg>
-        <pc:spChg chg="mod">
-          <ac:chgData name="Xin Zou" userId="260b9726081dae15" providerId="LiveId" clId="{778777A9-BF8E-46F6-9199-CD229551CBD5}" dt="2018-10-08T05:42:08.746" v="3452"/>
-          <ac:spMkLst>
-            <pc:docMk/>
-            <pc:sldMasterMk cId="254589341" sldId="2147483729"/>
-            <ac:spMk id="3" creationId="{00000000-0000-0000-0000-000000000000}"/>
-          </ac:spMkLst>
-        </pc:spChg>
-        <pc:spChg chg="mod">
-          <ac:chgData name="Xin Zou" userId="260b9726081dae15" providerId="LiveId" clId="{778777A9-BF8E-46F6-9199-CD229551CBD5}" dt="2018-10-08T05:42:08.746" v="3452"/>
-          <ac:spMkLst>
-            <pc:docMk/>
-            <pc:sldMasterMk cId="254589341" sldId="2147483729"/>
-            <ac:spMk id="4" creationId="{00000000-0000-0000-0000-000000000000}"/>
-          </ac:spMkLst>
-        </pc:spChg>
-        <pc:spChg chg="mod">
-          <ac:chgData name="Xin Zou" userId="260b9726081dae15" providerId="LiveId" clId="{778777A9-BF8E-46F6-9199-CD229551CBD5}" dt="2018-10-08T05:42:08.746" v="3452"/>
-          <ac:spMkLst>
-            <pc:docMk/>
-            <pc:sldMasterMk cId="254589341" sldId="2147483729"/>
-            <ac:spMk id="5" creationId="{00000000-0000-0000-0000-000000000000}"/>
-          </ac:spMkLst>
-        </pc:spChg>
-        <pc:spChg chg="mod">
-          <ac:chgData name="Xin Zou" userId="260b9726081dae15" providerId="LiveId" clId="{778777A9-BF8E-46F6-9199-CD229551CBD5}" dt="2018-10-08T05:42:08.746" v="3452"/>
-          <ac:spMkLst>
-            <pc:docMk/>
-            <pc:sldMasterMk cId="254589341" sldId="2147483729"/>
-            <ac:spMk id="6" creationId="{00000000-0000-0000-0000-000000000000}"/>
-          </ac:spMkLst>
-        </pc:spChg>
-        <pc:spChg chg="mod">
-          <ac:chgData name="Xin Zou" userId="260b9726081dae15" providerId="LiveId" clId="{778777A9-BF8E-46F6-9199-CD229551CBD5}" dt="2018-10-08T05:42:08.746" v="3452"/>
-          <ac:spMkLst>
-            <pc:docMk/>
-            <pc:sldMasterMk cId="254589341" sldId="2147483729"/>
-            <ac:spMk id="7" creationId="{00000000-0000-0000-0000-000000000000}"/>
-          </ac:spMkLst>
-        </pc:spChg>
-        <pc:spChg chg="mod">
-          <ac:chgData name="Xin Zou" userId="260b9726081dae15" providerId="LiveId" clId="{778777A9-BF8E-46F6-9199-CD229551CBD5}" dt="2018-10-08T05:42:08.746" v="3452"/>
-          <ac:spMkLst>
-            <pc:docMk/>
-            <pc:sldMasterMk cId="254589341" sldId="2147483729"/>
-            <ac:spMk id="10" creationId="{00000000-0000-0000-0000-000000000000}"/>
-          </ac:spMkLst>
-        </pc:spChg>
-        <pc:sldLayoutChg chg="modSp">
-          <pc:chgData name="Xin Zou" userId="260b9726081dae15" providerId="LiveId" clId="{778777A9-BF8E-46F6-9199-CD229551CBD5}" dt="2018-10-08T05:42:08.746" v="3452"/>
-          <pc:sldLayoutMkLst>
-            <pc:docMk/>
-            <pc:sldMasterMk cId="254589341" sldId="2147483729"/>
-            <pc:sldLayoutMk cId="237543045" sldId="2147483730"/>
-          </pc:sldLayoutMkLst>
-          <pc:spChg chg="mod">
-            <ac:chgData name="Xin Zou" userId="260b9726081dae15" providerId="LiveId" clId="{778777A9-BF8E-46F6-9199-CD229551CBD5}" dt="2018-10-08T05:42:08.746" v="3452"/>
-            <ac:spMkLst>
-              <pc:docMk/>
-              <pc:sldMasterMk cId="254589341" sldId="2147483729"/>
-              <pc:sldLayoutMk cId="237543045" sldId="2147483730"/>
-              <ac:spMk id="2" creationId="{00000000-0000-0000-0000-000000000000}"/>
-            </ac:spMkLst>
-          </pc:spChg>
-          <pc:spChg chg="mod">
-            <ac:chgData name="Xin Zou" userId="260b9726081dae15" providerId="LiveId" clId="{778777A9-BF8E-46F6-9199-CD229551CBD5}" dt="2018-10-08T05:42:08.746" v="3452"/>
-            <ac:spMkLst>
-              <pc:docMk/>
-              <pc:sldMasterMk cId="254589341" sldId="2147483729"/>
-              <pc:sldLayoutMk cId="237543045" sldId="2147483730"/>
-              <ac:spMk id="3" creationId="{00000000-0000-0000-0000-000000000000}"/>
-            </ac:spMkLst>
-          </pc:spChg>
-          <pc:spChg chg="mod">
-            <ac:chgData name="Xin Zou" userId="260b9726081dae15" providerId="LiveId" clId="{778777A9-BF8E-46F6-9199-CD229551CBD5}" dt="2018-10-08T05:42:08.746" v="3452"/>
-            <ac:spMkLst>
-              <pc:docMk/>
-              <pc:sldMasterMk cId="254589341" sldId="2147483729"/>
-              <pc:sldLayoutMk cId="237543045" sldId="2147483730"/>
-              <ac:spMk id="9" creationId="{00000000-0000-0000-0000-000000000000}"/>
-            </ac:spMkLst>
-          </pc:spChg>
-          <pc:spChg chg="mod">
-            <ac:chgData name="Xin Zou" userId="260b9726081dae15" providerId="LiveId" clId="{778777A9-BF8E-46F6-9199-CD229551CBD5}" dt="2018-10-08T05:42:08.746" v="3452"/>
-            <ac:spMkLst>
-              <pc:docMk/>
-              <pc:sldMasterMk cId="254589341" sldId="2147483729"/>
-              <pc:sldLayoutMk cId="237543045" sldId="2147483730"/>
-              <ac:spMk id="10" creationId="{00000000-0000-0000-0000-000000000000}"/>
-            </ac:spMkLst>
-          </pc:spChg>
-        </pc:sldLayoutChg>
-        <pc:sldLayoutChg chg="modSp">
-          <pc:chgData name="Xin Zou" userId="260b9726081dae15" providerId="LiveId" clId="{778777A9-BF8E-46F6-9199-CD229551CBD5}" dt="2018-10-08T05:42:08.746" v="3452"/>
-          <pc:sldLayoutMkLst>
-            <pc:docMk/>
-            <pc:sldMasterMk cId="254589341" sldId="2147483729"/>
-            <pc:sldLayoutMk cId="2168007055" sldId="2147483731"/>
-          </pc:sldLayoutMkLst>
-          <pc:spChg chg="mod">
-            <ac:chgData name="Xin Zou" userId="260b9726081dae15" providerId="LiveId" clId="{778777A9-BF8E-46F6-9199-CD229551CBD5}" dt="2018-10-08T05:42:08.746" v="3452"/>
-            <ac:spMkLst>
-              <pc:docMk/>
-              <pc:sldMasterMk cId="254589341" sldId="2147483729"/>
-              <pc:sldLayoutMk cId="2168007055" sldId="2147483731"/>
-              <ac:spMk id="2" creationId="{00000000-0000-0000-0000-000000000000}"/>
-            </ac:spMkLst>
-          </pc:spChg>
-        </pc:sldLayoutChg>
-        <pc:sldLayoutChg chg="modSp">
-          <pc:chgData name="Xin Zou" userId="260b9726081dae15" providerId="LiveId" clId="{778777A9-BF8E-46F6-9199-CD229551CBD5}" dt="2018-10-08T05:42:08.746" v="3452"/>
-          <pc:sldLayoutMkLst>
-            <pc:docMk/>
-            <pc:sldMasterMk cId="254589341" sldId="2147483729"/>
-            <pc:sldLayoutMk cId="3649888826" sldId="2147483732"/>
-          </pc:sldLayoutMkLst>
-          <pc:spChg chg="mod">
-            <ac:chgData name="Xin Zou" userId="260b9726081dae15" providerId="LiveId" clId="{778777A9-BF8E-46F6-9199-CD229551CBD5}" dt="2018-10-08T05:42:08.746" v="3452"/>
-            <ac:spMkLst>
-              <pc:docMk/>
-              <pc:sldMasterMk cId="254589341" sldId="2147483729"/>
-              <pc:sldLayoutMk cId="3649888826" sldId="2147483732"/>
-              <ac:spMk id="2" creationId="{00000000-0000-0000-0000-000000000000}"/>
-            </ac:spMkLst>
-          </pc:spChg>
-          <pc:spChg chg="mod">
-            <ac:chgData name="Xin Zou" userId="260b9726081dae15" providerId="LiveId" clId="{778777A9-BF8E-46F6-9199-CD229551CBD5}" dt="2018-10-08T05:42:08.746" v="3452"/>
-            <ac:spMkLst>
-              <pc:docMk/>
-              <pc:sldMasterMk cId="254589341" sldId="2147483729"/>
-              <pc:sldLayoutMk cId="3649888826" sldId="2147483732"/>
-              <ac:spMk id="3" creationId="{00000000-0000-0000-0000-000000000000}"/>
-            </ac:spMkLst>
-          </pc:spChg>
-          <pc:spChg chg="mod">
-            <ac:chgData name="Xin Zou" userId="260b9726081dae15" providerId="LiveId" clId="{778777A9-BF8E-46F6-9199-CD229551CBD5}" dt="2018-10-08T05:42:08.746" v="3452"/>
-            <ac:spMkLst>
-              <pc:docMk/>
-              <pc:sldMasterMk cId="254589341" sldId="2147483729"/>
-              <pc:sldLayoutMk cId="3649888826" sldId="2147483732"/>
-              <ac:spMk id="9" creationId="{00000000-0000-0000-0000-000000000000}"/>
-            </ac:spMkLst>
-          </pc:spChg>
-          <pc:spChg chg="mod">
-            <ac:chgData name="Xin Zou" userId="260b9726081dae15" providerId="LiveId" clId="{778777A9-BF8E-46F6-9199-CD229551CBD5}" dt="2018-10-08T05:42:08.746" v="3452"/>
-            <ac:spMkLst>
-              <pc:docMk/>
-              <pc:sldMasterMk cId="254589341" sldId="2147483729"/>
-              <pc:sldLayoutMk cId="3649888826" sldId="2147483732"/>
-              <ac:spMk id="12" creationId="{00000000-0000-0000-0000-000000000000}"/>
-            </ac:spMkLst>
-          </pc:spChg>
-        </pc:sldLayoutChg>
-        <pc:sldLayoutChg chg="modSp">
-          <pc:chgData name="Xin Zou" userId="260b9726081dae15" providerId="LiveId" clId="{778777A9-BF8E-46F6-9199-CD229551CBD5}" dt="2018-10-08T05:42:08.746" v="3452"/>
-          <pc:sldLayoutMkLst>
-            <pc:docMk/>
-            <pc:sldMasterMk cId="254589341" sldId="2147483729"/>
-            <pc:sldLayoutMk cId="2996794363" sldId="2147483733"/>
-          </pc:sldLayoutMkLst>
-          <pc:spChg chg="mod">
-            <ac:chgData name="Xin Zou" userId="260b9726081dae15" providerId="LiveId" clId="{778777A9-BF8E-46F6-9199-CD229551CBD5}" dt="2018-10-08T05:42:08.746" v="3452"/>
-            <ac:spMkLst>
-              <pc:docMk/>
-              <pc:sldMasterMk cId="254589341" sldId="2147483729"/>
-              <pc:sldLayoutMk cId="2996794363" sldId="2147483733"/>
-              <ac:spMk id="3" creationId="{00000000-0000-0000-0000-000000000000}"/>
-            </ac:spMkLst>
-          </pc:spChg>
-          <pc:spChg chg="mod">
-            <ac:chgData name="Xin Zou" userId="260b9726081dae15" providerId="LiveId" clId="{778777A9-BF8E-46F6-9199-CD229551CBD5}" dt="2018-10-08T05:42:08.746" v="3452"/>
-            <ac:spMkLst>
-              <pc:docMk/>
-              <pc:sldMasterMk cId="254589341" sldId="2147483729"/>
-              <pc:sldLayoutMk cId="2996794363" sldId="2147483733"/>
-              <ac:spMk id="4" creationId="{00000000-0000-0000-0000-000000000000}"/>
-            </ac:spMkLst>
-          </pc:spChg>
-        </pc:sldLayoutChg>
-        <pc:sldLayoutChg chg="modSp">
-          <pc:chgData name="Xin Zou" userId="260b9726081dae15" providerId="LiveId" clId="{778777A9-BF8E-46F6-9199-CD229551CBD5}" dt="2018-10-08T05:42:08.746" v="3452"/>
-          <pc:sldLayoutMkLst>
-            <pc:docMk/>
-            <pc:sldMasterMk cId="254589341" sldId="2147483729"/>
-            <pc:sldLayoutMk cId="2845955479" sldId="2147483734"/>
-          </pc:sldLayoutMkLst>
-          <pc:spChg chg="mod">
-            <ac:chgData name="Xin Zou" userId="260b9726081dae15" providerId="LiveId" clId="{778777A9-BF8E-46F6-9199-CD229551CBD5}" dt="2018-10-08T05:42:08.746" v="3452"/>
-            <ac:spMkLst>
-              <pc:docMk/>
-              <pc:sldMasterMk cId="254589341" sldId="2147483729"/>
-              <pc:sldLayoutMk cId="2845955479" sldId="2147483734"/>
-              <ac:spMk id="3" creationId="{00000000-0000-0000-0000-000000000000}"/>
-            </ac:spMkLst>
-          </pc:spChg>
-          <pc:spChg chg="mod">
-            <ac:chgData name="Xin Zou" userId="260b9726081dae15" providerId="LiveId" clId="{778777A9-BF8E-46F6-9199-CD229551CBD5}" dt="2018-10-08T05:42:08.746" v="3452"/>
-            <ac:spMkLst>
-              <pc:docMk/>
-              <pc:sldMasterMk cId="254589341" sldId="2147483729"/>
-              <pc:sldLayoutMk cId="2845955479" sldId="2147483734"/>
-              <ac:spMk id="4" creationId="{00000000-0000-0000-0000-000000000000}"/>
-            </ac:spMkLst>
-          </pc:spChg>
-          <pc:spChg chg="mod">
-            <ac:chgData name="Xin Zou" userId="260b9726081dae15" providerId="LiveId" clId="{778777A9-BF8E-46F6-9199-CD229551CBD5}" dt="2018-10-08T05:42:08.746" v="3452"/>
-            <ac:spMkLst>
-              <pc:docMk/>
-              <pc:sldMasterMk cId="254589341" sldId="2147483729"/>
-              <pc:sldLayoutMk cId="2845955479" sldId="2147483734"/>
-              <ac:spMk id="5" creationId="{00000000-0000-0000-0000-000000000000}"/>
-            </ac:spMkLst>
-          </pc:spChg>
-          <pc:spChg chg="mod">
-            <ac:chgData name="Xin Zou" userId="260b9726081dae15" providerId="LiveId" clId="{778777A9-BF8E-46F6-9199-CD229551CBD5}" dt="2018-10-08T05:42:08.746" v="3452"/>
-            <ac:spMkLst>
-              <pc:docMk/>
-              <pc:sldMasterMk cId="254589341" sldId="2147483729"/>
-              <pc:sldLayoutMk cId="2845955479" sldId="2147483734"/>
-              <ac:spMk id="6" creationId="{00000000-0000-0000-0000-000000000000}"/>
-            </ac:spMkLst>
-          </pc:spChg>
-        </pc:sldLayoutChg>
-        <pc:sldLayoutChg chg="modSp">
-          <pc:chgData name="Xin Zou" userId="260b9726081dae15" providerId="LiveId" clId="{778777A9-BF8E-46F6-9199-CD229551CBD5}" dt="2018-10-08T05:42:08.746" v="3452"/>
-          <pc:sldLayoutMkLst>
-            <pc:docMk/>
-            <pc:sldMasterMk cId="254589341" sldId="2147483729"/>
-            <pc:sldLayoutMk cId="3948224881" sldId="2147483737"/>
-          </pc:sldLayoutMkLst>
-          <pc:spChg chg="mod">
-            <ac:chgData name="Xin Zou" userId="260b9726081dae15" providerId="LiveId" clId="{778777A9-BF8E-46F6-9199-CD229551CBD5}" dt="2018-10-08T05:42:08.746" v="3452"/>
-            <ac:spMkLst>
-              <pc:docMk/>
-              <pc:sldMasterMk cId="254589341" sldId="2147483729"/>
-              <pc:sldLayoutMk cId="3948224881" sldId="2147483737"/>
-              <ac:spMk id="2" creationId="{00000000-0000-0000-0000-000000000000}"/>
-            </ac:spMkLst>
-          </pc:spChg>
-          <pc:spChg chg="mod">
-            <ac:chgData name="Xin Zou" userId="260b9726081dae15" providerId="LiveId" clId="{778777A9-BF8E-46F6-9199-CD229551CBD5}" dt="2018-10-08T05:42:08.746" v="3452"/>
-            <ac:spMkLst>
-              <pc:docMk/>
-              <pc:sldMasterMk cId="254589341" sldId="2147483729"/>
-              <pc:sldLayoutMk cId="3948224881" sldId="2147483737"/>
-              <ac:spMk id="3" creationId="{00000000-0000-0000-0000-000000000000}"/>
-            </ac:spMkLst>
-          </pc:spChg>
-          <pc:spChg chg="mod">
-            <ac:chgData name="Xin Zou" userId="260b9726081dae15" providerId="LiveId" clId="{778777A9-BF8E-46F6-9199-CD229551CBD5}" dt="2018-10-08T05:42:08.746" v="3452"/>
-            <ac:spMkLst>
-              <pc:docMk/>
-              <pc:sldMasterMk cId="254589341" sldId="2147483729"/>
-              <pc:sldLayoutMk cId="3948224881" sldId="2147483737"/>
-              <ac:spMk id="4" creationId="{00000000-0000-0000-0000-000000000000}"/>
-            </ac:spMkLst>
-          </pc:spChg>
-          <pc:spChg chg="mod">
-            <ac:chgData name="Xin Zou" userId="260b9726081dae15" providerId="LiveId" clId="{778777A9-BF8E-46F6-9199-CD229551CBD5}" dt="2018-10-08T05:42:08.746" v="3452"/>
-            <ac:spMkLst>
-              <pc:docMk/>
-              <pc:sldMasterMk cId="254589341" sldId="2147483729"/>
-              <pc:sldLayoutMk cId="3948224881" sldId="2147483737"/>
-              <ac:spMk id="9" creationId="{00000000-0000-0000-0000-000000000000}"/>
-            </ac:spMkLst>
-          </pc:spChg>
-          <pc:spChg chg="mod">
-            <ac:chgData name="Xin Zou" userId="260b9726081dae15" providerId="LiveId" clId="{778777A9-BF8E-46F6-9199-CD229551CBD5}" dt="2018-10-08T05:42:08.746" v="3452"/>
-            <ac:spMkLst>
-              <pc:docMk/>
-              <pc:sldMasterMk cId="254589341" sldId="2147483729"/>
-              <pc:sldLayoutMk cId="3948224881" sldId="2147483737"/>
-              <ac:spMk id="12" creationId="{00000000-0000-0000-0000-000000000000}"/>
-            </ac:spMkLst>
-          </pc:spChg>
-        </pc:sldLayoutChg>
-        <pc:sldLayoutChg chg="modSp">
-          <pc:chgData name="Xin Zou" userId="260b9726081dae15" providerId="LiveId" clId="{778777A9-BF8E-46F6-9199-CD229551CBD5}" dt="2018-10-08T05:42:08.746" v="3452"/>
-          <pc:sldLayoutMkLst>
-            <pc:docMk/>
-            <pc:sldMasterMk cId="254589341" sldId="2147483729"/>
-            <pc:sldLayoutMk cId="2563908350" sldId="2147483738"/>
-          </pc:sldLayoutMkLst>
-          <pc:spChg chg="mod">
-            <ac:chgData name="Xin Zou" userId="260b9726081dae15" providerId="LiveId" clId="{778777A9-BF8E-46F6-9199-CD229551CBD5}" dt="2018-10-08T05:42:08.746" v="3452"/>
-            <ac:spMkLst>
-              <pc:docMk/>
-              <pc:sldMasterMk cId="254589341" sldId="2147483729"/>
-              <pc:sldLayoutMk cId="2563908350" sldId="2147483738"/>
-              <ac:spMk id="2" creationId="{00000000-0000-0000-0000-000000000000}"/>
-            </ac:spMkLst>
-          </pc:spChg>
-          <pc:spChg chg="mod">
-            <ac:chgData name="Xin Zou" userId="260b9726081dae15" providerId="LiveId" clId="{778777A9-BF8E-46F6-9199-CD229551CBD5}" dt="2018-10-08T05:42:08.746" v="3452"/>
-            <ac:spMkLst>
-              <pc:docMk/>
-              <pc:sldMasterMk cId="254589341" sldId="2147483729"/>
-              <pc:sldLayoutMk cId="2563908350" sldId="2147483738"/>
-              <ac:spMk id="3" creationId="{00000000-0000-0000-0000-000000000000}"/>
-            </ac:spMkLst>
-          </pc:spChg>
-          <pc:spChg chg="mod">
-            <ac:chgData name="Xin Zou" userId="260b9726081dae15" providerId="LiveId" clId="{778777A9-BF8E-46F6-9199-CD229551CBD5}" dt="2018-10-08T05:42:08.746" v="3452"/>
-            <ac:spMkLst>
-              <pc:docMk/>
-              <pc:sldMasterMk cId="254589341" sldId="2147483729"/>
-              <pc:sldLayoutMk cId="2563908350" sldId="2147483738"/>
-              <ac:spMk id="4" creationId="{00000000-0000-0000-0000-000000000000}"/>
-            </ac:spMkLst>
-          </pc:spChg>
-          <pc:spChg chg="mod">
-            <ac:chgData name="Xin Zou" userId="260b9726081dae15" providerId="LiveId" clId="{778777A9-BF8E-46F6-9199-CD229551CBD5}" dt="2018-10-08T05:42:08.746" v="3452"/>
-            <ac:spMkLst>
-              <pc:docMk/>
-              <pc:sldMasterMk cId="254589341" sldId="2147483729"/>
-              <pc:sldLayoutMk cId="2563908350" sldId="2147483738"/>
-              <ac:spMk id="5" creationId="{00000000-0000-0000-0000-000000000000}"/>
-            </ac:spMkLst>
-          </pc:spChg>
-          <pc:spChg chg="mod">
-            <ac:chgData name="Xin Zou" userId="260b9726081dae15" providerId="LiveId" clId="{778777A9-BF8E-46F6-9199-CD229551CBD5}" dt="2018-10-08T05:42:08.746" v="3452"/>
-            <ac:spMkLst>
-              <pc:docMk/>
-              <pc:sldMasterMk cId="254589341" sldId="2147483729"/>
-              <pc:sldLayoutMk cId="2563908350" sldId="2147483738"/>
-              <ac:spMk id="6" creationId="{00000000-0000-0000-0000-000000000000}"/>
-            </ac:spMkLst>
-          </pc:spChg>
-          <pc:spChg chg="mod">
-            <ac:chgData name="Xin Zou" userId="260b9726081dae15" providerId="LiveId" clId="{778777A9-BF8E-46F6-9199-CD229551CBD5}" dt="2018-10-08T05:42:08.746" v="3452"/>
-            <ac:spMkLst>
-              <pc:docMk/>
-              <pc:sldMasterMk cId="254589341" sldId="2147483729"/>
-              <pc:sldLayoutMk cId="2563908350" sldId="2147483738"/>
-              <ac:spMk id="7" creationId="{00000000-0000-0000-0000-000000000000}"/>
-            </ac:spMkLst>
-          </pc:spChg>
-          <pc:spChg chg="mod">
-            <ac:chgData name="Xin Zou" userId="260b9726081dae15" providerId="LiveId" clId="{778777A9-BF8E-46F6-9199-CD229551CBD5}" dt="2018-10-08T05:42:08.746" v="3452"/>
-            <ac:spMkLst>
-              <pc:docMk/>
-              <pc:sldMasterMk cId="254589341" sldId="2147483729"/>
-              <pc:sldLayoutMk cId="2563908350" sldId="2147483738"/>
-              <ac:spMk id="9" creationId="{00000000-0000-0000-0000-000000000000}"/>
-            </ac:spMkLst>
-          </pc:spChg>
-          <pc:spChg chg="mod">
-            <ac:chgData name="Xin Zou" userId="260b9726081dae15" providerId="LiveId" clId="{778777A9-BF8E-46F6-9199-CD229551CBD5}" dt="2018-10-08T05:42:08.746" v="3452"/>
-            <ac:spMkLst>
-              <pc:docMk/>
-              <pc:sldMasterMk cId="254589341" sldId="2147483729"/>
-              <pc:sldLayoutMk cId="2563908350" sldId="2147483738"/>
-              <ac:spMk id="11" creationId="{00000000-0000-0000-0000-000000000000}"/>
-            </ac:spMkLst>
-          </pc:spChg>
-        </pc:sldLayoutChg>
-        <pc:sldLayoutChg chg="modSp">
-          <pc:chgData name="Xin Zou" userId="260b9726081dae15" providerId="LiveId" clId="{778777A9-BF8E-46F6-9199-CD229551CBD5}" dt="2018-10-08T05:42:08.746" v="3452"/>
-          <pc:sldLayoutMkLst>
-            <pc:docMk/>
-            <pc:sldMasterMk cId="254589341" sldId="2147483729"/>
-            <pc:sldLayoutMk cId="683570359" sldId="2147483740"/>
-          </pc:sldLayoutMkLst>
-          <pc:spChg chg="mod">
-            <ac:chgData name="Xin Zou" userId="260b9726081dae15" providerId="LiveId" clId="{778777A9-BF8E-46F6-9199-CD229551CBD5}" dt="2018-10-08T05:42:08.746" v="3452"/>
-            <ac:spMkLst>
-              <pc:docMk/>
-              <pc:sldMasterMk cId="254589341" sldId="2147483729"/>
-              <pc:sldLayoutMk cId="683570359" sldId="2147483740"/>
-              <ac:spMk id="2" creationId="{00000000-0000-0000-0000-000000000000}"/>
-            </ac:spMkLst>
-          </pc:spChg>
-          <pc:spChg chg="mod">
-            <ac:chgData name="Xin Zou" userId="260b9726081dae15" providerId="LiveId" clId="{778777A9-BF8E-46F6-9199-CD229551CBD5}" dt="2018-10-08T05:42:08.746" v="3452"/>
-            <ac:spMkLst>
-              <pc:docMk/>
-              <pc:sldMasterMk cId="254589341" sldId="2147483729"/>
-              <pc:sldLayoutMk cId="683570359" sldId="2147483740"/>
-              <ac:spMk id="3" creationId="{00000000-0000-0000-0000-000000000000}"/>
-            </ac:spMkLst>
-          </pc:spChg>
-          <pc:spChg chg="mod">
-            <ac:chgData name="Xin Zou" userId="260b9726081dae15" providerId="LiveId" clId="{778777A9-BF8E-46F6-9199-CD229551CBD5}" dt="2018-10-08T05:42:08.746" v="3452"/>
-            <ac:spMkLst>
-              <pc:docMk/>
-              <pc:sldMasterMk cId="254589341" sldId="2147483729"/>
-              <pc:sldLayoutMk cId="683570359" sldId="2147483740"/>
-              <ac:spMk id="5" creationId="{00000000-0000-0000-0000-000000000000}"/>
-            </ac:spMkLst>
-          </pc:spChg>
-          <pc:spChg chg="mod">
-            <ac:chgData name="Xin Zou" userId="260b9726081dae15" providerId="LiveId" clId="{778777A9-BF8E-46F6-9199-CD229551CBD5}" dt="2018-10-08T05:42:08.746" v="3452"/>
-            <ac:spMkLst>
-              <pc:docMk/>
-              <pc:sldMasterMk cId="254589341" sldId="2147483729"/>
-              <pc:sldLayoutMk cId="683570359" sldId="2147483740"/>
-              <ac:spMk id="8" creationId="{00000000-0000-0000-0000-000000000000}"/>
-            </ac:spMkLst>
-          </pc:spChg>
-          <pc:spChg chg="mod">
-            <ac:chgData name="Xin Zou" userId="260b9726081dae15" providerId="LiveId" clId="{778777A9-BF8E-46F6-9199-CD229551CBD5}" dt="2018-10-08T05:42:08.746" v="3452"/>
-            <ac:spMkLst>
-              <pc:docMk/>
-              <pc:sldMasterMk cId="254589341" sldId="2147483729"/>
-              <pc:sldLayoutMk cId="683570359" sldId="2147483740"/>
-              <ac:spMk id="9" creationId="{00000000-0000-0000-0000-000000000000}"/>
-            </ac:spMkLst>
-          </pc:spChg>
-        </pc:sldLayoutChg>
-      </pc:sldMasterChg>
-    </pc:docChg>
-  </pc:docChgLst>
-</pc:chgInfo>
-</file>
-
 <file path=ppt/notesMasters/notesMaster1.xml><?xml version="1.0" encoding="utf-8"?>
 <p:notesMaster xmlns:a="http://schemas.openxmlformats.org/drawingml/2006/main" xmlns:r="http://schemas.openxmlformats.org/officeDocument/2006/relationships" xmlns:p="http://schemas.openxmlformats.org/presentationml/2006/main">
   <p:cSld>
@@ -1366,10 +298,6 @@
             </a:pPr>
             <a:fld id="{629CECF6-B44B-4827-95CE-F4DAD7D4955B}" type="datetimeFigureOut">
               <a:rPr lang="en-US"/>
-              <a:pPr>
-                <a:defRPr/>
-              </a:pPr>
-              <a:t>10/7/2018</a:t>
             </a:fld>
             <a:endParaRPr lang="en-US"/>
           </a:p>
@@ -1439,6 +367,7 @@
               <a:rPr lang="en-US" noProof="0"/>
               <a:t>Click to edit Master text styles</a:t>
             </a:r>
+            <a:endParaRPr lang="en-US" noProof="0"/>
           </a:p>
           <a:p>
             <a:pPr lvl="1"/>
@@ -1446,6 +375,7 @@
               <a:rPr lang="en-US" noProof="0"/>
               <a:t>Second level</a:t>
             </a:r>
+            <a:endParaRPr lang="en-US" noProof="0"/>
           </a:p>
           <a:p>
             <a:pPr lvl="2"/>
@@ -1453,6 +383,7 @@
               <a:rPr lang="en-US" noProof="0"/>
               <a:t>Third level</a:t>
             </a:r>
+            <a:endParaRPr lang="en-US" noProof="0"/>
           </a:p>
           <a:p>
             <a:pPr lvl="3"/>
@@ -1460,6 +391,7 @@
               <a:rPr lang="en-US" noProof="0"/>
               <a:t>Fourth level</a:t>
             </a:r>
+            <a:endParaRPr lang="en-US" noProof="0"/>
           </a:p>
           <a:p>
             <a:pPr lvl="4"/>
@@ -1467,6 +399,7 @@
               <a:rPr lang="en-US" noProof="0"/>
               <a:t>Fifth level</a:t>
             </a:r>
+            <a:endParaRPr lang="en-US" noProof="0"/>
           </a:p>
         </p:txBody>
       </p:sp>
@@ -1533,11 +466,7 @@
           </a:prstGeom>
         </p:spPr>
         <p:txBody>
-          <a:bodyPr vert="horz" wrap="square" lIns="91440" tIns="45720" rIns="91440" bIns="45720" numCol="1" anchor="b" anchorCtr="0" compatLnSpc="1">
-            <a:prstTxWarp prst="textNoShape">
-              <a:avLst/>
-            </a:prstTxWarp>
-          </a:bodyPr>
+          <a:bodyPr vert="horz" wrap="square" lIns="91440" tIns="45720" rIns="91440" bIns="45720" numCol="1" anchor="b" anchorCtr="0" compatLnSpc="1"/>
           <a:lstStyle>
             <a:lvl1pPr algn="r">
               <a:defRPr sz="1200">
@@ -1548,19 +477,12 @@
           <a:p>
             <a:fld id="{2518E120-2523-4C9B-A081-0137B07A5C39}" type="slidenum">
               <a:rPr lang="en-US"/>
-              <a:pPr/>
-              <a:t>‹#›</a:t>
             </a:fld>
             <a:endParaRPr lang="en-US"/>
           </a:p>
         </p:txBody>
       </p:sp>
     </p:spTree>
-    <p:extLst>
-      <p:ext uri="{BB962C8B-B14F-4D97-AF65-F5344CB8AC3E}">
-        <p14:creationId xmlns:p14="http://schemas.microsoft.com/office/powerpoint/2010/main" val="3145664774"/>
-      </p:ext>
-    </p:extLst>
   </p:cSld>
   <p:clrMap bg1="lt1" tx1="dk1" bg2="lt2" tx2="dk2" accent1="accent1" accent2="accent2" accent3="accent3" accent4="accent4" accent5="accent5" accent6="accent6" hlink="hlink" folHlink="folHlink"/>
   <p:notesStyle>
@@ -1726,8 +648,6 @@
               <a:srgbClr val="000000"/>
             </a:solidFill>
             <a:miter lim="800000"/>
-            <a:headEnd/>
-            <a:tailEnd/>
           </a:ln>
           <a:extLst>
             <a:ext uri="{909E8E84-426E-40DD-AFC4-6F175D3DCCD1}">
@@ -1773,11 +693,7 @@
           </a:extLst>
         </p:spPr>
         <p:txBody>
-          <a:bodyPr wrap="square" numCol="1" anchor="t" anchorCtr="0" compatLnSpc="1">
-            <a:prstTxWarp prst="textNoShape">
-              <a:avLst/>
-            </a:prstTxWarp>
-          </a:bodyPr>
+          <a:bodyPr wrap="square" numCol="1" anchor="t" anchorCtr="0" compatLnSpc="1"/>
           <a:lstStyle/>
           <a:p>
             <a:pPr eaLnBrk="1" hangingPunct="1">
@@ -1935,8 +851,6 @@
               <a:rPr lang="en-US">
                 <a:latin typeface="Calibri" panose="020F0502020204030204" pitchFamily="34" charset="0"/>
               </a:rPr>
-              <a:pPr eaLnBrk="1" hangingPunct="1"/>
-              <a:t>6</a:t>
             </a:fld>
             <a:endParaRPr lang="en-US">
               <a:latin typeface="Calibri" panose="020F0502020204030204" pitchFamily="34" charset="0"/>
@@ -1945,11 +859,6 @@
         </p:txBody>
       </p:sp>
     </p:spTree>
-    <p:extLst>
-      <p:ext uri="{BB962C8B-B14F-4D97-AF65-F5344CB8AC3E}">
-        <p14:creationId xmlns:p14="http://schemas.microsoft.com/office/powerpoint/2010/main" val="1030318971"/>
-      </p:ext>
-    </p:extLst>
   </p:cSld>
   <p:clrMapOvr>
     <a:masterClrMapping/>
@@ -2010,6 +919,7 @@
               <a:rPr lang="en-US" dirty="0"/>
               <a:t>https://www.safaribooksonline.com/library/view/pragmatic-unit-testing/9781680500769/f_0051.html</a:t>
             </a:r>
+            <a:endParaRPr lang="en-US" dirty="0"/>
           </a:p>
           <a:p>
             <a:endParaRPr lang="en-US" dirty="0"/>
@@ -2060,19 +970,12 @@
           <a:p>
             <a:fld id="{2518E120-2523-4C9B-A081-0137B07A5C39}" type="slidenum">
               <a:rPr lang="en-US" smtClean="0"/>
-              <a:pPr/>
-              <a:t>15</a:t>
             </a:fld>
             <a:endParaRPr lang="en-US"/>
           </a:p>
         </p:txBody>
       </p:sp>
     </p:spTree>
-    <p:extLst>
-      <p:ext uri="{BB962C8B-B14F-4D97-AF65-F5344CB8AC3E}">
-        <p14:creationId xmlns:p14="http://schemas.microsoft.com/office/powerpoint/2010/main" val="24280855"/>
-      </p:ext>
-    </p:extLst>
   </p:cSld>
   <p:clrMapOvr>
     <a:masterClrMapping/>
@@ -2276,7 +1179,6 @@
           <a:p>
             <a:fld id="{48A87A34-81AB-432B-8DAE-1953F412C126}" type="datetimeFigureOut">
               <a:rPr lang="en-US" smtClean="0"/>
-              <a:t>10/7/2018</a:t>
             </a:fld>
             <a:endParaRPr lang="en-US" dirty="0"/>
           </a:p>
@@ -2318,18 +1220,12 @@
           <a:p>
             <a:fld id="{6D22F896-40B5-4ADD-8801-0D06FADFA095}" type="slidenum">
               <a:rPr lang="en-US" smtClean="0"/>
-              <a:t>‹#›</a:t>
             </a:fld>
             <a:endParaRPr lang="en-US" dirty="0"/>
           </a:p>
         </p:txBody>
       </p:sp>
     </p:spTree>
-    <p:extLst>
-      <p:ext uri="{BB962C8B-B14F-4D97-AF65-F5344CB8AC3E}">
-        <p14:creationId xmlns:p14="http://schemas.microsoft.com/office/powerpoint/2010/main" val="175699992"/>
-      </p:ext>
-    </p:extLst>
   </p:cSld>
   <p:clrMapOvr>
     <a:masterClrMapping/>
@@ -2537,6 +1433,7 @@
               <a:rPr lang="en-US"/>
               <a:t>Edit Master text styles</a:t>
             </a:r>
+            <a:endParaRPr lang="en-US"/>
           </a:p>
         </p:txBody>
       </p:sp>
@@ -2557,8 +1454,6 @@
           <a:p>
             <a:fld id="{48A87A34-81AB-432B-8DAE-1953F412C126}" type="datetimeFigureOut">
               <a:rPr lang="en-US" smtClean="0"/>
-              <a:pPr/>
-              <a:t>10/7/2018</a:t>
             </a:fld>
             <a:endParaRPr lang="en-US" dirty="0"/>
           </a:p>
@@ -2600,19 +1495,12 @@
           <a:p>
             <a:fld id="{6D22F896-40B5-4ADD-8801-0D06FADFA095}" type="slidenum">
               <a:rPr lang="en-US" smtClean="0"/>
-              <a:pPr/>
-              <a:t>‹#›</a:t>
             </a:fld>
             <a:endParaRPr lang="en-US" dirty="0"/>
           </a:p>
         </p:txBody>
       </p:sp>
     </p:spTree>
-    <p:extLst>
-      <p:ext uri="{BB962C8B-B14F-4D97-AF65-F5344CB8AC3E}">
-        <p14:creationId xmlns:p14="http://schemas.microsoft.com/office/powerpoint/2010/main" val="2737361062"/>
-      </p:ext>
-    </p:extLst>
   </p:cSld>
   <p:clrMapOvr>
     <a:masterClrMapping/>
@@ -2731,6 +1619,7 @@
               <a:rPr lang="en-US"/>
               <a:t>Edit Master text styles</a:t>
             </a:r>
+            <a:endParaRPr lang="en-US"/>
           </a:p>
         </p:txBody>
       </p:sp>
@@ -2751,8 +1640,6 @@
           <a:p>
             <a:fld id="{48A87A34-81AB-432B-8DAE-1953F412C126}" type="datetimeFigureOut">
               <a:rPr lang="en-US" smtClean="0"/>
-              <a:pPr/>
-              <a:t>10/7/2018</a:t>
             </a:fld>
             <a:endParaRPr lang="en-US" dirty="0"/>
           </a:p>
@@ -2794,19 +1681,12 @@
           <a:p>
             <a:fld id="{6D22F896-40B5-4ADD-8801-0D06FADFA095}" type="slidenum">
               <a:rPr lang="en-US" smtClean="0"/>
-              <a:pPr/>
-              <a:t>‹#›</a:t>
             </a:fld>
             <a:endParaRPr lang="en-US" dirty="0"/>
           </a:p>
         </p:txBody>
       </p:sp>
     </p:spTree>
-    <p:extLst>
-      <p:ext uri="{BB962C8B-B14F-4D97-AF65-F5344CB8AC3E}">
-        <p14:creationId xmlns:p14="http://schemas.microsoft.com/office/powerpoint/2010/main" val="3103003866"/>
-      </p:ext>
-    </p:extLst>
   </p:cSld>
   <p:clrMapOvr>
     <a:masterClrMapping/>
@@ -2927,6 +1807,7 @@
               <a:rPr lang="en-US"/>
               <a:t>Edit Master text styles</a:t>
             </a:r>
+            <a:endParaRPr lang="en-US"/>
           </a:p>
         </p:txBody>
       </p:sp>
@@ -2994,6 +1875,7 @@
               <a:rPr lang="en-US"/>
               <a:t>Edit Master text styles</a:t>
             </a:r>
+            <a:endParaRPr lang="en-US"/>
           </a:p>
         </p:txBody>
       </p:sp>
@@ -3014,8 +1896,6 @@
           <a:p>
             <a:fld id="{48A87A34-81AB-432B-8DAE-1953F412C126}" type="datetimeFigureOut">
               <a:rPr lang="en-US" smtClean="0"/>
-              <a:pPr/>
-              <a:t>10/7/2018</a:t>
             </a:fld>
             <a:endParaRPr lang="en-US" dirty="0"/>
           </a:p>
@@ -3057,8 +1937,6 @@
           <a:p>
             <a:fld id="{6D22F896-40B5-4ADD-8801-0D06FADFA095}" type="slidenum">
               <a:rPr lang="en-US" smtClean="0"/>
-              <a:pPr/>
-              <a:t>‹#›</a:t>
             </a:fld>
             <a:endParaRPr lang="en-US" dirty="0"/>
           </a:p>
@@ -3177,6 +2055,12 @@
               </a:rPr>
               <a:t>“</a:t>
             </a:r>
+            <a:endParaRPr lang="en-US" sz="8000" dirty="0">
+              <a:solidFill>
+                <a:schemeClr val="tx1"/>
+              </a:solidFill>
+              <a:effectLst/>
+            </a:endParaRPr>
           </a:p>
         </p:txBody>
       </p:sp>
@@ -3293,15 +2177,16 @@
               </a:rPr>
               <a:t>”</a:t>
             </a:r>
+            <a:endParaRPr lang="en-US" sz="8000" dirty="0">
+              <a:solidFill>
+                <a:schemeClr val="tx1"/>
+              </a:solidFill>
+              <a:effectLst/>
+            </a:endParaRPr>
           </a:p>
         </p:txBody>
       </p:sp>
     </p:spTree>
-    <p:extLst>
-      <p:ext uri="{BB962C8B-B14F-4D97-AF65-F5344CB8AC3E}">
-        <p14:creationId xmlns:p14="http://schemas.microsoft.com/office/powerpoint/2010/main" val="3390087061"/>
-      </p:ext>
-    </p:extLst>
   </p:cSld>
   <p:clrMapOvr>
     <a:masterClrMapping/>
@@ -3422,6 +2307,7 @@
               <a:rPr lang="en-US"/>
               <a:t>Edit Master text styles</a:t>
             </a:r>
+            <a:endParaRPr lang="en-US"/>
           </a:p>
         </p:txBody>
       </p:sp>
@@ -3442,8 +2328,6 @@
           <a:p>
             <a:fld id="{48A87A34-81AB-432B-8DAE-1953F412C126}" type="datetimeFigureOut">
               <a:rPr lang="en-US" smtClean="0"/>
-              <a:pPr/>
-              <a:t>10/7/2018</a:t>
             </a:fld>
             <a:endParaRPr lang="en-US" dirty="0"/>
           </a:p>
@@ -3485,19 +2369,12 @@
           <a:p>
             <a:fld id="{6D22F896-40B5-4ADD-8801-0D06FADFA095}" type="slidenum">
               <a:rPr lang="en-US" smtClean="0"/>
-              <a:pPr/>
-              <a:t>‹#›</a:t>
             </a:fld>
             <a:endParaRPr lang="en-US" dirty="0"/>
           </a:p>
         </p:txBody>
       </p:sp>
     </p:spTree>
-    <p:extLst>
-      <p:ext uri="{BB962C8B-B14F-4D97-AF65-F5344CB8AC3E}">
-        <p14:creationId xmlns:p14="http://schemas.microsoft.com/office/powerpoint/2010/main" val="108517006"/>
-      </p:ext>
-    </p:extLst>
   </p:cSld>
   <p:clrMapOvr>
     <a:masterClrMapping/>
@@ -3641,6 +2518,7 @@
               <a:rPr lang="en-US"/>
               <a:t>Edit Master text styles</a:t>
             </a:r>
+            <a:endParaRPr lang="en-US"/>
           </a:p>
         </p:txBody>
       </p:sp>
@@ -3708,6 +2586,7 @@
               <a:rPr lang="en-US"/>
               <a:t>Edit Master text styles</a:t>
             </a:r>
+            <a:endParaRPr lang="en-US"/>
           </a:p>
         </p:txBody>
       </p:sp>
@@ -3772,6 +2651,7 @@
               <a:rPr lang="en-US"/>
               <a:t>Edit Master text styles</a:t>
             </a:r>
+            <a:endParaRPr lang="en-US"/>
           </a:p>
         </p:txBody>
       </p:sp>
@@ -3839,6 +2719,7 @@
               <a:rPr lang="en-US"/>
               <a:t>Edit Master text styles</a:t>
             </a:r>
+            <a:endParaRPr lang="en-US"/>
           </a:p>
         </p:txBody>
       </p:sp>
@@ -3903,6 +2784,7 @@
               <a:rPr lang="en-US"/>
               <a:t>Edit Master text styles</a:t>
             </a:r>
+            <a:endParaRPr lang="en-US"/>
           </a:p>
         </p:txBody>
       </p:sp>
@@ -3970,6 +2852,7 @@
               <a:rPr lang="en-US"/>
               <a:t>Edit Master text styles</a:t>
             </a:r>
+            <a:endParaRPr lang="en-US"/>
           </a:p>
         </p:txBody>
       </p:sp>
@@ -3990,8 +2873,6 @@
           <a:p>
             <a:fld id="{48A87A34-81AB-432B-8DAE-1953F412C126}" type="datetimeFigureOut">
               <a:rPr lang="en-US" smtClean="0"/>
-              <a:pPr/>
-              <a:t>10/7/2018</a:t>
             </a:fld>
             <a:endParaRPr lang="en-US" dirty="0"/>
           </a:p>
@@ -4033,19 +2914,12 @@
           <a:p>
             <a:fld id="{6D22F896-40B5-4ADD-8801-0D06FADFA095}" type="slidenum">
               <a:rPr lang="en-US" smtClean="0"/>
-              <a:pPr/>
-              <a:t>‹#›</a:t>
             </a:fld>
             <a:endParaRPr lang="en-US" dirty="0"/>
           </a:p>
         </p:txBody>
       </p:sp>
     </p:spTree>
-    <p:extLst>
-      <p:ext uri="{BB962C8B-B14F-4D97-AF65-F5344CB8AC3E}">
-        <p14:creationId xmlns:p14="http://schemas.microsoft.com/office/powerpoint/2010/main" val="1274115089"/>
-      </p:ext>
-    </p:extLst>
   </p:cSld>
   <p:clrMapOvr>
     <a:masterClrMapping/>
@@ -4185,6 +3059,7 @@
               <a:rPr lang="en-US"/>
               <a:t>Edit Master text styles</a:t>
             </a:r>
+            <a:endParaRPr lang="en-US"/>
           </a:p>
         </p:txBody>
       </p:sp>
@@ -4331,6 +3206,7 @@
               <a:rPr lang="en-US"/>
               <a:t>Edit Master text styles</a:t>
             </a:r>
+            <a:endParaRPr lang="en-US"/>
           </a:p>
         </p:txBody>
       </p:sp>
@@ -4421,6 +3297,7 @@
               <a:rPr lang="en-US"/>
               <a:t>Edit Master text styles</a:t>
             </a:r>
+            <a:endParaRPr lang="en-US"/>
           </a:p>
         </p:txBody>
       </p:sp>
@@ -4567,6 +3444,7 @@
               <a:rPr lang="en-US"/>
               <a:t>Edit Master text styles</a:t>
             </a:r>
+            <a:endParaRPr lang="en-US"/>
           </a:p>
         </p:txBody>
       </p:sp>
@@ -4657,6 +3535,7 @@
               <a:rPr lang="en-US"/>
               <a:t>Edit Master text styles</a:t>
             </a:r>
+            <a:endParaRPr lang="en-US"/>
           </a:p>
         </p:txBody>
       </p:sp>
@@ -4803,6 +3682,7 @@
               <a:rPr lang="en-US"/>
               <a:t>Edit Master text styles</a:t>
             </a:r>
+            <a:endParaRPr lang="en-US"/>
           </a:p>
         </p:txBody>
       </p:sp>
@@ -4823,8 +3703,6 @@
           <a:p>
             <a:fld id="{48A87A34-81AB-432B-8DAE-1953F412C126}" type="datetimeFigureOut">
               <a:rPr lang="en-US" smtClean="0"/>
-              <a:pPr/>
-              <a:t>10/7/2018</a:t>
             </a:fld>
             <a:endParaRPr lang="en-US" dirty="0"/>
           </a:p>
@@ -4866,19 +3744,12 @@
           <a:p>
             <a:fld id="{6D22F896-40B5-4ADD-8801-0D06FADFA095}" type="slidenum">
               <a:rPr lang="en-US" smtClean="0"/>
-              <a:pPr/>
-              <a:t>‹#›</a:t>
             </a:fld>
             <a:endParaRPr lang="en-US" dirty="0"/>
           </a:p>
         </p:txBody>
       </p:sp>
     </p:spTree>
-    <p:extLst>
-      <p:ext uri="{BB962C8B-B14F-4D97-AF65-F5344CB8AC3E}">
-        <p14:creationId xmlns:p14="http://schemas.microsoft.com/office/powerpoint/2010/main" val="3750809504"/>
-      </p:ext>
-    </p:extLst>
   </p:cSld>
   <p:clrMapOvr>
     <a:masterClrMapping/>
@@ -4946,6 +3817,7 @@
               <a:rPr lang="en-US"/>
               <a:t>Edit Master text styles</a:t>
             </a:r>
+            <a:endParaRPr lang="en-US"/>
           </a:p>
           <a:p>
             <a:pPr lvl="1"/>
@@ -4953,6 +3825,7 @@
               <a:rPr lang="en-US"/>
               <a:t>Second level</a:t>
             </a:r>
+            <a:endParaRPr lang="en-US"/>
           </a:p>
           <a:p>
             <a:pPr lvl="2"/>
@@ -4960,6 +3833,7 @@
               <a:rPr lang="en-US"/>
               <a:t>Third level</a:t>
             </a:r>
+            <a:endParaRPr lang="en-US"/>
           </a:p>
           <a:p>
             <a:pPr lvl="3"/>
@@ -4967,6 +3841,7 @@
               <a:rPr lang="en-US"/>
               <a:t>Fourth level</a:t>
             </a:r>
+            <a:endParaRPr lang="en-US"/>
           </a:p>
           <a:p>
             <a:pPr lvl="4"/>
@@ -4995,7 +3870,6 @@
           <a:p>
             <a:fld id="{48A87A34-81AB-432B-8DAE-1953F412C126}" type="datetimeFigureOut">
               <a:rPr lang="en-US" smtClean="0"/>
-              <a:t>10/7/2018</a:t>
             </a:fld>
             <a:endParaRPr lang="en-US" dirty="0"/>
           </a:p>
@@ -5037,18 +3911,12 @@
           <a:p>
             <a:fld id="{6D22F896-40B5-4ADD-8801-0D06FADFA095}" type="slidenum">
               <a:rPr lang="en-US" smtClean="0"/>
-              <a:t>‹#›</a:t>
             </a:fld>
             <a:endParaRPr lang="en-US" dirty="0"/>
           </a:p>
         </p:txBody>
       </p:sp>
     </p:spTree>
-    <p:extLst>
-      <p:ext uri="{BB962C8B-B14F-4D97-AF65-F5344CB8AC3E}">
-        <p14:creationId xmlns:p14="http://schemas.microsoft.com/office/powerpoint/2010/main" val="947545551"/>
-      </p:ext>
-    </p:extLst>
   </p:cSld>
   <p:clrMapOvr>
     <a:masterClrMapping/>
@@ -5126,6 +3994,7 @@
               <a:rPr lang="en-US"/>
               <a:t>Edit Master text styles</a:t>
             </a:r>
+            <a:endParaRPr lang="en-US"/>
           </a:p>
           <a:p>
             <a:pPr lvl="1"/>
@@ -5133,6 +4002,7 @@
               <a:rPr lang="en-US"/>
               <a:t>Second level</a:t>
             </a:r>
+            <a:endParaRPr lang="en-US"/>
           </a:p>
           <a:p>
             <a:pPr lvl="2"/>
@@ -5140,6 +4010,7 @@
               <a:rPr lang="en-US"/>
               <a:t>Third level</a:t>
             </a:r>
+            <a:endParaRPr lang="en-US"/>
           </a:p>
           <a:p>
             <a:pPr lvl="3"/>
@@ -5147,6 +4018,7 @@
               <a:rPr lang="en-US"/>
               <a:t>Fourth level</a:t>
             </a:r>
+            <a:endParaRPr lang="en-US"/>
           </a:p>
           <a:p>
             <a:pPr lvl="4"/>
@@ -5175,7 +4047,6 @@
           <a:p>
             <a:fld id="{48A87A34-81AB-432B-8DAE-1953F412C126}" type="datetimeFigureOut">
               <a:rPr lang="en-US" smtClean="0"/>
-              <a:t>10/7/2018</a:t>
             </a:fld>
             <a:endParaRPr lang="en-US" dirty="0"/>
           </a:p>
@@ -5217,18 +4088,12 @@
           <a:p>
             <a:fld id="{6D22F896-40B5-4ADD-8801-0D06FADFA095}" type="slidenum">
               <a:rPr lang="en-US" smtClean="0"/>
-              <a:t>‹#›</a:t>
             </a:fld>
             <a:endParaRPr lang="en-US" dirty="0"/>
           </a:p>
         </p:txBody>
       </p:sp>
     </p:spTree>
-    <p:extLst>
-      <p:ext uri="{BB962C8B-B14F-4D97-AF65-F5344CB8AC3E}">
-        <p14:creationId xmlns:p14="http://schemas.microsoft.com/office/powerpoint/2010/main" val="157366807"/>
-      </p:ext>
-    </p:extLst>
   </p:cSld>
   <p:clrMapOvr>
     <a:masterClrMapping/>
@@ -5296,6 +4161,7 @@
               <a:rPr lang="en-US"/>
               <a:t>Edit Master text styles</a:t>
             </a:r>
+            <a:endParaRPr lang="en-US"/>
           </a:p>
           <a:p>
             <a:pPr lvl="1"/>
@@ -5303,6 +4169,7 @@
               <a:rPr lang="en-US"/>
               <a:t>Second level</a:t>
             </a:r>
+            <a:endParaRPr lang="en-US"/>
           </a:p>
           <a:p>
             <a:pPr lvl="2"/>
@@ -5310,6 +4177,7 @@
               <a:rPr lang="en-US"/>
               <a:t>Third level</a:t>
             </a:r>
+            <a:endParaRPr lang="en-US"/>
           </a:p>
           <a:p>
             <a:pPr lvl="3"/>
@@ -5317,6 +4185,7 @@
               <a:rPr lang="en-US"/>
               <a:t>Fourth level</a:t>
             </a:r>
+            <a:endParaRPr lang="en-US"/>
           </a:p>
           <a:p>
             <a:pPr lvl="4"/>
@@ -5345,7 +4214,6 @@
           <a:p>
             <a:fld id="{48A87A34-81AB-432B-8DAE-1953F412C126}" type="datetimeFigureOut">
               <a:rPr lang="en-US" smtClean="0"/>
-              <a:t>10/7/2018</a:t>
             </a:fld>
             <a:endParaRPr lang="en-US" dirty="0"/>
           </a:p>
@@ -5387,18 +4255,12 @@
           <a:p>
             <a:fld id="{6D22F896-40B5-4ADD-8801-0D06FADFA095}" type="slidenum">
               <a:rPr lang="en-US" smtClean="0"/>
-              <a:t>‹#›</a:t>
             </a:fld>
             <a:endParaRPr lang="en-US" dirty="0"/>
           </a:p>
         </p:txBody>
       </p:sp>
     </p:spTree>
-    <p:extLst>
-      <p:ext uri="{BB962C8B-B14F-4D97-AF65-F5344CB8AC3E}">
-        <p14:creationId xmlns:p14="http://schemas.microsoft.com/office/powerpoint/2010/main" val="2472349274"/>
-      </p:ext>
-    </p:extLst>
   </p:cSld>
   <p:clrMapOvr>
     <a:masterClrMapping/>
@@ -5602,7 +4464,6 @@
           <a:p>
             <a:fld id="{48A87A34-81AB-432B-8DAE-1953F412C126}" type="datetimeFigureOut">
               <a:rPr lang="en-US" smtClean="0"/>
-              <a:t>10/7/2018</a:t>
             </a:fld>
             <a:endParaRPr lang="en-US" dirty="0"/>
           </a:p>
@@ -5644,18 +4505,12 @@
           <a:p>
             <a:fld id="{6D22F896-40B5-4ADD-8801-0D06FADFA095}" type="slidenum">
               <a:rPr lang="en-US" smtClean="0"/>
-              <a:t>‹#›</a:t>
             </a:fld>
             <a:endParaRPr lang="en-US" dirty="0"/>
           </a:p>
         </p:txBody>
       </p:sp>
     </p:spTree>
-    <p:extLst>
-      <p:ext uri="{BB962C8B-B14F-4D97-AF65-F5344CB8AC3E}">
-        <p14:creationId xmlns:p14="http://schemas.microsoft.com/office/powerpoint/2010/main" val="3582165818"/>
-      </p:ext>
-    </p:extLst>
   </p:cSld>
   <p:clrMapOvr>
     <a:masterClrMapping/>
@@ -5728,6 +4583,7 @@
               <a:rPr lang="en-US"/>
               <a:t>Edit Master text styles</a:t>
             </a:r>
+            <a:endParaRPr lang="en-US"/>
           </a:p>
           <a:p>
             <a:pPr lvl="1"/>
@@ -5735,6 +4591,7 @@
               <a:rPr lang="en-US"/>
               <a:t>Second level</a:t>
             </a:r>
+            <a:endParaRPr lang="en-US"/>
           </a:p>
           <a:p>
             <a:pPr lvl="2"/>
@@ -5742,6 +4599,7 @@
               <a:rPr lang="en-US"/>
               <a:t>Third level</a:t>
             </a:r>
+            <a:endParaRPr lang="en-US"/>
           </a:p>
           <a:p>
             <a:pPr lvl="3"/>
@@ -5749,6 +4607,7 @@
               <a:rPr lang="en-US"/>
               <a:t>Fourth level</a:t>
             </a:r>
+            <a:endParaRPr lang="en-US"/>
           </a:p>
           <a:p>
             <a:pPr lvl="4"/>
@@ -5785,6 +4644,7 @@
               <a:rPr lang="en-US"/>
               <a:t>Edit Master text styles</a:t>
             </a:r>
+            <a:endParaRPr lang="en-US"/>
           </a:p>
           <a:p>
             <a:pPr lvl="1"/>
@@ -5792,6 +4652,7 @@
               <a:rPr lang="en-US"/>
               <a:t>Second level</a:t>
             </a:r>
+            <a:endParaRPr lang="en-US"/>
           </a:p>
           <a:p>
             <a:pPr lvl="2"/>
@@ -5799,6 +4660,7 @@
               <a:rPr lang="en-US"/>
               <a:t>Third level</a:t>
             </a:r>
+            <a:endParaRPr lang="en-US"/>
           </a:p>
           <a:p>
             <a:pPr lvl="3"/>
@@ -5806,6 +4668,7 @@
               <a:rPr lang="en-US"/>
               <a:t>Fourth level</a:t>
             </a:r>
+            <a:endParaRPr lang="en-US"/>
           </a:p>
           <a:p>
             <a:pPr lvl="4"/>
@@ -5834,7 +4697,6 @@
           <a:p>
             <a:fld id="{48A87A34-81AB-432B-8DAE-1953F412C126}" type="datetimeFigureOut">
               <a:rPr lang="en-US" smtClean="0"/>
-              <a:t>10/7/2018</a:t>
             </a:fld>
             <a:endParaRPr lang="en-US" dirty="0"/>
           </a:p>
@@ -5876,18 +4738,12 @@
           <a:p>
             <a:fld id="{6D22F896-40B5-4ADD-8801-0D06FADFA095}" type="slidenum">
               <a:rPr lang="en-US" smtClean="0"/>
-              <a:t>‹#›</a:t>
             </a:fld>
             <a:endParaRPr lang="en-US" dirty="0"/>
           </a:p>
         </p:txBody>
       </p:sp>
     </p:spTree>
-    <p:extLst>
-      <p:ext uri="{BB962C8B-B14F-4D97-AF65-F5344CB8AC3E}">
-        <p14:creationId xmlns:p14="http://schemas.microsoft.com/office/powerpoint/2010/main" val="1228824750"/>
-      </p:ext>
-    </p:extLst>
   </p:cSld>
   <p:clrMapOvr>
     <a:masterClrMapping/>
@@ -6029,6 +4885,7 @@
               <a:rPr lang="en-US"/>
               <a:t>Edit Master text styles</a:t>
             </a:r>
+            <a:endParaRPr lang="en-US"/>
           </a:p>
         </p:txBody>
       </p:sp>
@@ -6057,6 +4914,7 @@
               <a:rPr lang="en-US"/>
               <a:t>Edit Master text styles</a:t>
             </a:r>
+            <a:endParaRPr lang="en-US"/>
           </a:p>
           <a:p>
             <a:pPr lvl="1"/>
@@ -6064,6 +4922,7 @@
               <a:rPr lang="en-US"/>
               <a:t>Second level</a:t>
             </a:r>
+            <a:endParaRPr lang="en-US"/>
           </a:p>
           <a:p>
             <a:pPr lvl="2"/>
@@ -6071,6 +4930,7 @@
               <a:rPr lang="en-US"/>
               <a:t>Third level</a:t>
             </a:r>
+            <a:endParaRPr lang="en-US"/>
           </a:p>
           <a:p>
             <a:pPr lvl="3"/>
@@ -6078,6 +4938,7 @@
               <a:rPr lang="en-US"/>
               <a:t>Fourth level</a:t>
             </a:r>
+            <a:endParaRPr lang="en-US"/>
           </a:p>
           <a:p>
             <a:pPr lvl="4"/>
@@ -6150,6 +5011,7 @@
               <a:rPr lang="en-US"/>
               <a:t>Edit Master text styles</a:t>
             </a:r>
+            <a:endParaRPr lang="en-US"/>
           </a:p>
         </p:txBody>
       </p:sp>
@@ -6178,6 +5040,7 @@
               <a:rPr lang="en-US"/>
               <a:t>Edit Master text styles</a:t>
             </a:r>
+            <a:endParaRPr lang="en-US"/>
           </a:p>
           <a:p>
             <a:pPr lvl="1"/>
@@ -6185,6 +5048,7 @@
               <a:rPr lang="en-US"/>
               <a:t>Second level</a:t>
             </a:r>
+            <a:endParaRPr lang="en-US"/>
           </a:p>
           <a:p>
             <a:pPr lvl="2"/>
@@ -6192,6 +5056,7 @@
               <a:rPr lang="en-US"/>
               <a:t>Third level</a:t>
             </a:r>
+            <a:endParaRPr lang="en-US"/>
           </a:p>
           <a:p>
             <a:pPr lvl="3"/>
@@ -6199,6 +5064,7 @@
               <a:rPr lang="en-US"/>
               <a:t>Fourth level</a:t>
             </a:r>
+            <a:endParaRPr lang="en-US"/>
           </a:p>
           <a:p>
             <a:pPr lvl="4"/>
@@ -6227,7 +5093,6 @@
           <a:p>
             <a:fld id="{48A87A34-81AB-432B-8DAE-1953F412C126}" type="datetimeFigureOut">
               <a:rPr lang="en-US" smtClean="0"/>
-              <a:t>10/7/2018</a:t>
             </a:fld>
             <a:endParaRPr lang="en-US" dirty="0"/>
           </a:p>
@@ -6269,18 +5134,12 @@
           <a:p>
             <a:fld id="{6D22F896-40B5-4ADD-8801-0D06FADFA095}" type="slidenum">
               <a:rPr lang="en-US" smtClean="0"/>
-              <a:t>‹#›</a:t>
             </a:fld>
             <a:endParaRPr lang="en-US" dirty="0"/>
           </a:p>
         </p:txBody>
       </p:sp>
     </p:spTree>
-    <p:extLst>
-      <p:ext uri="{BB962C8B-B14F-4D97-AF65-F5344CB8AC3E}">
-        <p14:creationId xmlns:p14="http://schemas.microsoft.com/office/powerpoint/2010/main" val="1653340430"/>
-      </p:ext>
-    </p:extLst>
   </p:cSld>
   <p:clrMapOvr>
     <a:masterClrMapping/>
@@ -6345,7 +5204,6 @@
           <a:p>
             <a:fld id="{48A87A34-81AB-432B-8DAE-1953F412C126}" type="datetimeFigureOut">
               <a:rPr lang="en-US" smtClean="0"/>
-              <a:t>10/7/2018</a:t>
             </a:fld>
             <a:endParaRPr lang="en-US" dirty="0"/>
           </a:p>
@@ -6387,18 +5245,12 @@
           <a:p>
             <a:fld id="{6D22F896-40B5-4ADD-8801-0D06FADFA095}" type="slidenum">
               <a:rPr lang="en-US" smtClean="0"/>
-              <a:t>‹#›</a:t>
             </a:fld>
             <a:endParaRPr lang="en-US" dirty="0"/>
           </a:p>
         </p:txBody>
       </p:sp>
     </p:spTree>
-    <p:extLst>
-      <p:ext uri="{BB962C8B-B14F-4D97-AF65-F5344CB8AC3E}">
-        <p14:creationId xmlns:p14="http://schemas.microsoft.com/office/powerpoint/2010/main" val="2351303779"/>
-      </p:ext>
-    </p:extLst>
   </p:cSld>
   <p:clrMapOvr>
     <a:masterClrMapping/>
@@ -6440,7 +5292,6 @@
           <a:p>
             <a:fld id="{48A87A34-81AB-432B-8DAE-1953F412C126}" type="datetimeFigureOut">
               <a:rPr lang="en-US" smtClean="0"/>
-              <a:t>10/7/2018</a:t>
             </a:fld>
             <a:endParaRPr lang="en-US" dirty="0"/>
           </a:p>
@@ -6482,18 +5333,12 @@
           <a:p>
             <a:fld id="{6D22F896-40B5-4ADD-8801-0D06FADFA095}" type="slidenum">
               <a:rPr lang="en-US" smtClean="0"/>
-              <a:t>‹#›</a:t>
             </a:fld>
             <a:endParaRPr lang="en-US" dirty="0"/>
           </a:p>
         </p:txBody>
       </p:sp>
     </p:spTree>
-    <p:extLst>
-      <p:ext uri="{BB962C8B-B14F-4D97-AF65-F5344CB8AC3E}">
-        <p14:creationId xmlns:p14="http://schemas.microsoft.com/office/powerpoint/2010/main" val="2637299568"/>
-      </p:ext>
-    </p:extLst>
   </p:cSld>
   <p:clrMapOvr>
     <a:masterClrMapping/>
@@ -6575,6 +5420,7 @@
               <a:rPr lang="en-US"/>
               <a:t>Edit Master text styles</a:t>
             </a:r>
+            <a:endParaRPr lang="en-US"/>
           </a:p>
           <a:p>
             <a:pPr lvl="1"/>
@@ -6582,6 +5428,7 @@
               <a:rPr lang="en-US"/>
               <a:t>Second level</a:t>
             </a:r>
+            <a:endParaRPr lang="en-US"/>
           </a:p>
           <a:p>
             <a:pPr lvl="2"/>
@@ -6589,6 +5436,7 @@
               <a:rPr lang="en-US"/>
               <a:t>Third level</a:t>
             </a:r>
+            <a:endParaRPr lang="en-US"/>
           </a:p>
           <a:p>
             <a:pPr lvl="3"/>
@@ -6596,6 +5444,7 @@
               <a:rPr lang="en-US"/>
               <a:t>Fourth level</a:t>
             </a:r>
+            <a:endParaRPr lang="en-US"/>
           </a:p>
           <a:p>
             <a:pPr lvl="4"/>
@@ -6693,6 +5542,7 @@
               <a:rPr lang="en-US"/>
               <a:t>Edit Master text styles</a:t>
             </a:r>
+            <a:endParaRPr lang="en-US"/>
           </a:p>
         </p:txBody>
       </p:sp>
@@ -6713,7 +5563,6 @@
           <a:p>
             <a:fld id="{48A87A34-81AB-432B-8DAE-1953F412C126}" type="datetimeFigureOut">
               <a:rPr lang="en-US" smtClean="0"/>
-              <a:t>10/7/2018</a:t>
             </a:fld>
             <a:endParaRPr lang="en-US" dirty="0"/>
           </a:p>
@@ -6755,18 +5604,12 @@
           <a:p>
             <a:fld id="{6D22F896-40B5-4ADD-8801-0D06FADFA095}" type="slidenum">
               <a:rPr lang="en-US" smtClean="0"/>
-              <a:t>‹#›</a:t>
             </a:fld>
             <a:endParaRPr lang="en-US" dirty="0"/>
           </a:p>
         </p:txBody>
       </p:sp>
     </p:spTree>
-    <p:extLst>
-      <p:ext uri="{BB962C8B-B14F-4D97-AF65-F5344CB8AC3E}">
-        <p14:creationId xmlns:p14="http://schemas.microsoft.com/office/powerpoint/2010/main" val="632439413"/>
-      </p:ext>
-    </p:extLst>
   </p:cSld>
   <p:clrMapOvr>
     <a:masterClrMapping/>
@@ -6974,6 +5817,7 @@
               <a:rPr lang="en-US"/>
               <a:t>Edit Master text styles</a:t>
             </a:r>
+            <a:endParaRPr lang="en-US"/>
           </a:p>
         </p:txBody>
       </p:sp>
@@ -6994,7 +5838,6 @@
           <a:p>
             <a:fld id="{48A87A34-81AB-432B-8DAE-1953F412C126}" type="datetimeFigureOut">
               <a:rPr lang="en-US" smtClean="0"/>
-              <a:t>10/7/2018</a:t>
             </a:fld>
             <a:endParaRPr lang="en-US" dirty="0"/>
           </a:p>
@@ -7036,18 +5879,12 @@
           <a:p>
             <a:fld id="{6D22F896-40B5-4ADD-8801-0D06FADFA095}" type="slidenum">
               <a:rPr lang="en-US" smtClean="0"/>
-              <a:t>‹#›</a:t>
             </a:fld>
             <a:endParaRPr lang="en-US" dirty="0"/>
           </a:p>
         </p:txBody>
       </p:sp>
     </p:spTree>
-    <p:extLst>
-      <p:ext uri="{BB962C8B-B14F-4D97-AF65-F5344CB8AC3E}">
-        <p14:creationId xmlns:p14="http://schemas.microsoft.com/office/powerpoint/2010/main" val="2752872899"/>
-      </p:ext>
-    </p:extLst>
   </p:cSld>
   <p:clrMapOvr>
     <a:masterClrMapping/>
@@ -7061,7 +5898,7 @@
     <p:bg>
       <p:bgPr>
         <a:blipFill dpi="0" rotWithShape="1">
-          <a:blip r:embed="rId19">
+          <a:blip r:embed="rId18">
             <a:lum/>
           </a:blip>
           <a:srcRect/>
@@ -7149,6 +5986,7 @@
               <a:rPr lang="en-US"/>
               <a:t>Edit Master text styles</a:t>
             </a:r>
+            <a:endParaRPr lang="en-US"/>
           </a:p>
           <a:p>
             <a:pPr lvl="1"/>
@@ -7156,6 +5994,7 @@
               <a:rPr lang="en-US"/>
               <a:t>Second level</a:t>
             </a:r>
+            <a:endParaRPr lang="en-US"/>
           </a:p>
           <a:p>
             <a:pPr lvl="2"/>
@@ -7163,6 +6002,7 @@
               <a:rPr lang="en-US"/>
               <a:t>Third level</a:t>
             </a:r>
+            <a:endParaRPr lang="en-US"/>
           </a:p>
           <a:p>
             <a:pPr lvl="3"/>
@@ -7170,6 +6010,7 @@
               <a:rPr lang="en-US"/>
               <a:t>Fourth level</a:t>
             </a:r>
+            <a:endParaRPr lang="en-US"/>
           </a:p>
           <a:p>
             <a:pPr lvl="4"/>
@@ -7234,8 +6075,6 @@
           <a:p>
             <a:fld id="{48A87A34-81AB-432B-8DAE-1953F412C126}" type="datetimeFigureOut">
               <a:rPr lang="en-US" smtClean="0"/>
-              <a:pPr/>
-              <a:t>10/7/2018</a:t>
             </a:fld>
             <a:endParaRPr lang="en-US" dirty="0"/>
           </a:p>
@@ -7349,39 +6188,32 @@
           <a:p>
             <a:fld id="{6D22F896-40B5-4ADD-8801-0D06FADFA095}" type="slidenum">
               <a:rPr lang="en-US" smtClean="0"/>
-              <a:pPr/>
-              <a:t>‹#›</a:t>
             </a:fld>
             <a:endParaRPr lang="en-US" dirty="0"/>
           </a:p>
         </p:txBody>
       </p:sp>
     </p:spTree>
-    <p:extLst>
-      <p:ext uri="{BB962C8B-B14F-4D97-AF65-F5344CB8AC3E}">
-        <p14:creationId xmlns:p14="http://schemas.microsoft.com/office/powerpoint/2010/main" val="2672641220"/>
-      </p:ext>
-    </p:extLst>
   </p:cSld>
   <p:clrMap bg1="dk1" tx1="lt1" bg2="dk2" tx2="lt2" accent1="accent1" accent2="accent2" accent3="accent3" accent4="accent4" accent5="accent5" accent6="accent6" hlink="hlink" folHlink="folHlink"/>
   <p:sldLayoutIdLst>
-    <p:sldLayoutId id="2147483742" r:id="rId1"/>
-    <p:sldLayoutId id="2147483743" r:id="rId2"/>
-    <p:sldLayoutId id="2147483744" r:id="rId3"/>
-    <p:sldLayoutId id="2147483745" r:id="rId4"/>
-    <p:sldLayoutId id="2147483746" r:id="rId5"/>
-    <p:sldLayoutId id="2147483747" r:id="rId6"/>
-    <p:sldLayoutId id="2147483748" r:id="rId7"/>
-    <p:sldLayoutId id="2147483749" r:id="rId8"/>
-    <p:sldLayoutId id="2147483750" r:id="rId9"/>
-    <p:sldLayoutId id="2147483751" r:id="rId10"/>
-    <p:sldLayoutId id="2147483752" r:id="rId11"/>
-    <p:sldLayoutId id="2147483753" r:id="rId12"/>
-    <p:sldLayoutId id="2147483754" r:id="rId13"/>
-    <p:sldLayoutId id="2147483755" r:id="rId14"/>
-    <p:sldLayoutId id="2147483756" r:id="rId15"/>
-    <p:sldLayoutId id="2147483757" r:id="rId16"/>
-    <p:sldLayoutId id="2147483758" r:id="rId17"/>
+    <p:sldLayoutId id="2147483649" r:id="rId1"/>
+    <p:sldLayoutId id="2147483650" r:id="rId2"/>
+    <p:sldLayoutId id="2147483651" r:id="rId3"/>
+    <p:sldLayoutId id="2147483652" r:id="rId4"/>
+    <p:sldLayoutId id="2147483653" r:id="rId5"/>
+    <p:sldLayoutId id="2147483654" r:id="rId6"/>
+    <p:sldLayoutId id="2147483655" r:id="rId7"/>
+    <p:sldLayoutId id="2147483656" r:id="rId8"/>
+    <p:sldLayoutId id="2147483657" r:id="rId9"/>
+    <p:sldLayoutId id="2147483658" r:id="rId10"/>
+    <p:sldLayoutId id="2147483659" r:id="rId11"/>
+    <p:sldLayoutId id="2147483660" r:id="rId12"/>
+    <p:sldLayoutId id="2147483661" r:id="rId13"/>
+    <p:sldLayoutId id="2147483662" r:id="rId14"/>
+    <p:sldLayoutId id="2147483663" r:id="rId15"/>
+    <p:sldLayoutId id="2147483664" r:id="rId16"/>
+    <p:sldLayoutId id="2147483665" r:id="rId17"/>
   </p:sldLayoutIdLst>
   <p:txStyles>
     <p:titleStyle>
@@ -8006,11 +6838,6 @@
         </p:txBody>
       </p:sp>
     </p:spTree>
-    <p:extLst>
-      <p:ext uri="{BB962C8B-B14F-4D97-AF65-F5344CB8AC3E}">
-        <p14:creationId xmlns:p14="http://schemas.microsoft.com/office/powerpoint/2010/main" val="1054160130"/>
-      </p:ext>
-    </p:extLst>
   </p:cSld>
   <p:clrMapOvr>
     <a:masterClrMapping/>
@@ -8162,11 +6989,6 @@
         </p:txBody>
       </p:sp>
     </p:spTree>
-    <p:extLst>
-      <p:ext uri="{BB962C8B-B14F-4D97-AF65-F5344CB8AC3E}">
-        <p14:creationId xmlns:p14="http://schemas.microsoft.com/office/powerpoint/2010/main" val="730287098"/>
-      </p:ext>
-    </p:extLst>
   </p:cSld>
   <p:clrMapOvr>
     <a:masterClrMapping/>
@@ -8193,13 +7015,7 @@
       </p:grpSpPr>
       <p:sp>
         <p:nvSpPr>
-          <p:cNvPr id="2" name="Title 1">
-            <a:extLst>
-              <a:ext uri="{FF2B5EF4-FFF2-40B4-BE49-F238E27FC236}">
-                <a16:creationId xmlns:a16="http://schemas.microsoft.com/office/drawing/2014/main" id="{233A296E-554E-4DA3-87FB-CA91E1F6E59D}"/>
-              </a:ext>
-            </a:extLst>
-          </p:cNvPr>
+          <p:cNvPr id="2" name="Title 1"/>
           <p:cNvSpPr>
             <a:spLocks noGrp="1"/>
           </p:cNvSpPr>
@@ -8236,13 +7052,7 @@
       </p:sp>
       <p:sp>
         <p:nvSpPr>
-          <p:cNvPr id="3" name="Content Placeholder 2">
-            <a:extLst>
-              <a:ext uri="{FF2B5EF4-FFF2-40B4-BE49-F238E27FC236}">
-                <a16:creationId xmlns:a16="http://schemas.microsoft.com/office/drawing/2014/main" id="{9BA4195B-AFAF-4D75-A9F9-A5A4C7DAF27C}"/>
-              </a:ext>
-            </a:extLst>
-          </p:cNvPr>
+          <p:cNvPr id="3" name="Content Placeholder 2"/>
           <p:cNvSpPr>
             <a:spLocks noGrp="1"/>
           </p:cNvSpPr>
@@ -8278,6 +7088,7 @@
               <a:rPr lang="zh-CN" altLang="en-US" dirty="0"/>
               <a:t>例如代码申请了内存 或其他资源，但并没有释放。又如，代码中并没有处理错误情况。或者没有处理 和文件、网络相关的一些异常情况，例如文件不存在、权限有问题，等等。</a:t>
             </a:r>
+            <a:endParaRPr lang="zh-CN" altLang="en-US" dirty="0"/>
           </a:p>
           <a:p>
             <a:pPr>
@@ -8301,6 +7112,7 @@
               <a:rPr lang="zh-CN" altLang="en-US" dirty="0"/>
               <a:t>有些情况下，可以针对代码效率写一个单元测试。</a:t>
             </a:r>
+            <a:endParaRPr lang="zh-CN" altLang="en-US" dirty="0"/>
           </a:p>
           <a:p>
             <a:pPr>
@@ -8353,11 +7165,6 @@
         </p:txBody>
       </p:sp>
     </p:spTree>
-    <p:extLst>
-      <p:ext uri="{BB962C8B-B14F-4D97-AF65-F5344CB8AC3E}">
-        <p14:creationId xmlns:p14="http://schemas.microsoft.com/office/powerpoint/2010/main" val="3705111125"/>
-      </p:ext>
-    </p:extLst>
   </p:cSld>
   <p:clrMapOvr>
     <a:masterClrMapping/>
@@ -8557,6 +7364,7 @@
               <a:rPr lang="en-US" altLang="zh-CN" dirty="0"/>
               <a:t>Regression</a:t>
             </a:r>
+            <a:endParaRPr lang="en-US" altLang="zh-CN" dirty="0"/>
           </a:p>
           <a:p>
             <a:pPr>
@@ -8569,11 +7377,6 @@
         </p:txBody>
       </p:sp>
     </p:spTree>
-    <p:extLst>
-      <p:ext uri="{BB962C8B-B14F-4D97-AF65-F5344CB8AC3E}">
-        <p14:creationId xmlns:p14="http://schemas.microsoft.com/office/powerpoint/2010/main" val="48979433"/>
-      </p:ext>
-    </p:extLst>
   </p:cSld>
   <p:clrMapOvr>
     <a:masterClrMapping/>
@@ -8730,6 +7533,7 @@
               <a:rPr lang="en-US" altLang="zh-CN" sz="2000" dirty="0"/>
               <a:t>?</a:t>
             </a:r>
+            <a:endParaRPr lang="en-US" altLang="zh-CN" sz="2000" dirty="0"/>
           </a:p>
           <a:p>
             <a:r>
@@ -8757,11 +7561,6 @@
         </p:txBody>
       </p:sp>
     </p:spTree>
-    <p:extLst>
-      <p:ext uri="{BB962C8B-B14F-4D97-AF65-F5344CB8AC3E}">
-        <p14:creationId xmlns:p14="http://schemas.microsoft.com/office/powerpoint/2010/main" val="3793012036"/>
-      </p:ext>
-    </p:extLst>
   </p:cSld>
   <p:clrMapOvr>
     <a:masterClrMapping/>
@@ -8826,7 +7625,7 @@
           </a:bodyPr>
           <a:lstStyle/>
           <a:p>
-            <a:pPr marL="118872" indent="0">
+            <a:pPr marL="118745" indent="0">
               <a:buNone/>
             </a:pPr>
             <a:r>
@@ -8876,6 +7675,7 @@
               <a:rPr lang="en-US" altLang="zh-CN" dirty="0"/>
               <a:t>?</a:t>
             </a:r>
+            <a:endParaRPr lang="en-US" altLang="zh-CN" dirty="0"/>
           </a:p>
           <a:p>
             <a:pPr lvl="1"/>
@@ -8972,7 +7772,7 @@
             <a:endParaRPr lang="en-US" altLang="zh-CN" dirty="0"/>
           </a:p>
           <a:p>
-            <a:pPr marL="118872" indent="0">
+            <a:pPr marL="118745" indent="0">
               <a:buNone/>
             </a:pPr>
             <a:endParaRPr lang="zh-CN" altLang="en-US" dirty="0"/>
@@ -8980,11 +7780,6 @@
         </p:txBody>
       </p:sp>
     </p:spTree>
-    <p:extLst>
-      <p:ext uri="{BB962C8B-B14F-4D97-AF65-F5344CB8AC3E}">
-        <p14:creationId xmlns:p14="http://schemas.microsoft.com/office/powerpoint/2010/main" val="3404328805"/>
-      </p:ext>
-    </p:extLst>
   </p:cSld>
   <p:clrMapOvr>
     <a:masterClrMapping/>
@@ -9125,14 +7920,14 @@
             <a:pPr lvl="1"/>
             <a:r>
               <a:rPr lang="en-US" sz="2000" dirty="0">
-                <a:hlinkClick r:id="rId2"/>
+                <a:hlinkClick r:id="rId1"/>
               </a:rPr>
               <a:t>http://www.cnblogs.com/xinz/p/3318230.html</a:t>
             </a:r>
             <a:endParaRPr lang="en-US" sz="2000" dirty="0"/>
           </a:p>
           <a:p>
-            <a:pPr marL="319088" lvl="1" indent="0">
+            <a:pPr marL="319405" lvl="1" indent="0">
               <a:buNone/>
             </a:pPr>
             <a:endParaRPr lang="en-US" sz="2000" dirty="0"/>
@@ -9148,7 +7943,7 @@
           <p:nvPr/>
         </p:nvPicPr>
         <p:blipFill>
-          <a:blip r:embed="rId3">
+          <a:blip r:embed="rId2">
             <a:extLst>
               <a:ext uri="{28A0092B-C50C-407E-A947-70E740481C1C}">
                 <a14:useLocalDpi xmlns:a14="http://schemas.microsoft.com/office/drawing/2010/main" val="0"/>
@@ -9189,7 +7984,7 @@
           <p:nvPr/>
         </p:nvPicPr>
         <p:blipFill>
-          <a:blip r:embed="rId4">
+          <a:blip r:embed="rId3">
             <a:extLst>
               <a:ext uri="{28A0092B-C50C-407E-A947-70E740481C1C}">
                 <a14:useLocalDpi xmlns:a14="http://schemas.microsoft.com/office/drawing/2010/main" val="0"/>
@@ -9222,11 +8017,6 @@
         </p:spPr>
       </p:pic>
     </p:spTree>
-    <p:extLst>
-      <p:ext uri="{BB962C8B-B14F-4D97-AF65-F5344CB8AC3E}">
-        <p14:creationId xmlns:p14="http://schemas.microsoft.com/office/powerpoint/2010/main" val="2880097445"/>
-      </p:ext>
-    </p:extLst>
   </p:cSld>
   <p:clrMapOvr>
     <a:masterClrMapping/>
@@ -9274,6 +8064,7 @@
               <a:rPr lang="en-US" dirty="0"/>
               <a:t>2D array</a:t>
             </a:r>
+            <a:endParaRPr lang="en-US" dirty="0"/>
           </a:p>
         </p:txBody>
       </p:sp>
@@ -9288,7 +8079,7 @@
           </p:nvPr>
         </p:nvPicPr>
         <p:blipFill>
-          <a:blip r:embed="rId2">
+          <a:blip r:embed="rId1">
             <a:extLst>
               <a:ext uri="{28A0092B-C50C-407E-A947-70E740481C1C}">
                 <a14:useLocalDpi xmlns:a14="http://schemas.microsoft.com/office/drawing/2010/main" val="0"/>
@@ -9437,11 +8228,6 @@
         </p:txBody>
       </p:sp>
     </p:spTree>
-    <p:extLst>
-      <p:ext uri="{BB962C8B-B14F-4D97-AF65-F5344CB8AC3E}">
-        <p14:creationId xmlns:p14="http://schemas.microsoft.com/office/powerpoint/2010/main" val="1709060020"/>
-      </p:ext>
-    </p:extLst>
   </p:cSld>
   <p:clrMapOvr>
     <a:masterClrMapping/>
@@ -9493,6 +8279,7 @@
               <a:rPr lang="en-US" dirty="0"/>
               <a:t>D result</a:t>
             </a:r>
+            <a:endParaRPr lang="en-US" dirty="0"/>
           </a:p>
         </p:txBody>
       </p:sp>
@@ -9505,7 +8292,7 @@
           <p:nvPr/>
         </p:nvPicPr>
         <p:blipFill>
-          <a:blip r:embed="rId2">
+          <a:blip r:embed="rId1">
             <a:extLst>
               <a:ext uri="{28A0092B-C50C-407E-A947-70E740481C1C}">
                 <a14:useLocalDpi xmlns:a14="http://schemas.microsoft.com/office/drawing/2010/main" val="0"/>
@@ -9640,6 +8427,7 @@
               <a:rPr lang="en-US" altLang="zh-CN" dirty="0"/>
               <a:t>PSP</a:t>
             </a:r>
+            <a:endParaRPr lang="en-US" altLang="zh-CN" dirty="0"/>
           </a:p>
           <a:p>
             <a:r>
@@ -9658,11 +8446,6 @@
         </p:txBody>
       </p:sp>
     </p:spTree>
-    <p:extLst>
-      <p:ext uri="{BB962C8B-B14F-4D97-AF65-F5344CB8AC3E}">
-        <p14:creationId xmlns:p14="http://schemas.microsoft.com/office/powerpoint/2010/main" val="3934912793"/>
-      </p:ext>
-    </p:extLst>
   </p:cSld>
   <p:clrMapOvr>
     <a:masterClrMapping/>
@@ -9772,11 +8555,6 @@
         </p:txBody>
       </p:sp>
     </p:spTree>
-    <p:extLst>
-      <p:ext uri="{BB962C8B-B14F-4D97-AF65-F5344CB8AC3E}">
-        <p14:creationId xmlns:p14="http://schemas.microsoft.com/office/powerpoint/2010/main" val="1670099988"/>
-      </p:ext>
-    </p:extLst>
   </p:cSld>
   <p:clrMapOvr>
     <a:masterClrMapping/>
@@ -9826,13 +8604,7 @@
       </p:sp>
       <p:pic>
         <p:nvPicPr>
-          <p:cNvPr id="4" name="Content Placeholder 3">
-            <a:extLst>
-              <a:ext uri="{FF2B5EF4-FFF2-40B4-BE49-F238E27FC236}">
-                <a16:creationId xmlns:a16="http://schemas.microsoft.com/office/drawing/2014/main" id="{59E5CAD4-C3A8-4CFB-A997-4E538BA0CEE5}"/>
-              </a:ext>
-            </a:extLst>
-          </p:cNvPr>
+          <p:cNvPr id="4" name="Content Placeholder 3"/>
           <p:cNvPicPr>
             <a:picLocks noGrp="1" noChangeAspect="1"/>
           </p:cNvPicPr>
@@ -9841,7 +8613,7 @@
           </p:nvPr>
         </p:nvPicPr>
         <p:blipFill>
-          <a:blip r:embed="rId2"/>
+          <a:blip r:embed="rId1"/>
           <a:stretch>
             <a:fillRect/>
           </a:stretch>
@@ -9857,11 +8629,6 @@
         </p:spPr>
       </p:pic>
     </p:spTree>
-    <p:extLst>
-      <p:ext uri="{BB962C8B-B14F-4D97-AF65-F5344CB8AC3E}">
-        <p14:creationId xmlns:p14="http://schemas.microsoft.com/office/powerpoint/2010/main" val="2284784455"/>
-      </p:ext>
-    </p:extLst>
   </p:cSld>
   <p:clrMapOvr>
     <a:masterClrMapping/>
@@ -9941,31 +8708,31 @@
           <a:p>
             <a:r>
               <a:rPr lang="en-US" dirty="0">
+                <a:hlinkClick r:id="rId1"/>
+              </a:rPr>
+              <a:t>http://www.cnblogs.com/xinz/archive/2011/11/20/2255809.html</a:t>
+            </a:r>
+            <a:endParaRPr lang="en-US" dirty="0"/>
+          </a:p>
+          <a:p>
+            <a:endParaRPr lang="en-US" dirty="0"/>
+          </a:p>
+          <a:p>
+            <a:r>
+              <a:rPr lang="en-US" altLang="zh-CN" dirty="0"/>
+              <a:t>Java </a:t>
+            </a:r>
+            <a:r>
+              <a:rPr lang="zh-CN" altLang="en-US" dirty="0"/>
+              <a:t>程序的效能建议：</a:t>
+            </a:r>
+            <a:endParaRPr lang="en-US" altLang="zh-CN" dirty="0"/>
+          </a:p>
+          <a:p>
+            <a:r>
+              <a:rPr lang="en-US" dirty="0">
                 <a:hlinkClick r:id="rId2"/>
               </a:rPr>
-              <a:t>http://www.cnblogs.com/xinz/archive/2011/11/20/2255809.html</a:t>
-            </a:r>
-            <a:endParaRPr lang="en-US" dirty="0"/>
-          </a:p>
-          <a:p>
-            <a:endParaRPr lang="en-US" dirty="0"/>
-          </a:p>
-          <a:p>
-            <a:r>
-              <a:rPr lang="en-US" altLang="zh-CN" dirty="0"/>
-              <a:t>Java </a:t>
-            </a:r>
-            <a:r>
-              <a:rPr lang="zh-CN" altLang="en-US" dirty="0"/>
-              <a:t>程序的效能建议：</a:t>
-            </a:r>
-            <a:endParaRPr lang="en-US" altLang="zh-CN" dirty="0"/>
-          </a:p>
-          <a:p>
-            <a:r>
-              <a:rPr lang="en-US" dirty="0">
-                <a:hlinkClick r:id="rId3"/>
-              </a:rPr>
               <a:t>http://www.cnblogs.com/xrq730/p/4865416.html</a:t>
             </a:r>
             <a:endParaRPr lang="en-US" dirty="0"/>
@@ -9980,7 +8747,7 @@
             <a:endParaRPr lang="en-US" dirty="0"/>
           </a:p>
           <a:p>
-            <a:pPr marL="118872" indent="0">
+            <a:pPr marL="118745" indent="0">
               <a:buNone/>
             </a:pPr>
             <a:endParaRPr lang="en-US" dirty="0"/>
@@ -9991,11 +8758,6 @@
         </p:txBody>
       </p:sp>
     </p:spTree>
-    <p:extLst>
-      <p:ext uri="{BB962C8B-B14F-4D97-AF65-F5344CB8AC3E}">
-        <p14:creationId xmlns:p14="http://schemas.microsoft.com/office/powerpoint/2010/main" val="3543712019"/>
-      </p:ext>
-    </p:extLst>
   </p:cSld>
   <p:clrMapOvr>
     <a:masterClrMapping/>
@@ -10022,13 +8784,7 @@
       </p:grpSpPr>
       <p:sp>
         <p:nvSpPr>
-          <p:cNvPr id="2" name="Title 1">
-            <a:extLst>
-              <a:ext uri="{FF2B5EF4-FFF2-40B4-BE49-F238E27FC236}">
-                <a16:creationId xmlns:a16="http://schemas.microsoft.com/office/drawing/2014/main" id="{352B4F0D-4D02-4662-8FA7-4C04BC522248}"/>
-              </a:ext>
-            </a:extLst>
-          </p:cNvPr>
+          <p:cNvPr id="2" name="Title 1"/>
           <p:cNvSpPr>
             <a:spLocks noGrp="1"/>
           </p:cNvSpPr>
@@ -10055,13 +8811,7 @@
       </p:sp>
       <p:sp>
         <p:nvSpPr>
-          <p:cNvPr id="3" name="Content Placeholder 2">
-            <a:extLst>
-              <a:ext uri="{FF2B5EF4-FFF2-40B4-BE49-F238E27FC236}">
-                <a16:creationId xmlns:a16="http://schemas.microsoft.com/office/drawing/2014/main" id="{DC2EB974-3A66-4B23-9533-93BD202F34F7}"/>
-              </a:ext>
-            </a:extLst>
-          </p:cNvPr>
+          <p:cNvPr id="3" name="Content Placeholder 2"/>
           <p:cNvSpPr>
             <a:spLocks noGrp="1"/>
           </p:cNvSpPr>
@@ -10078,48 +8828,39 @@
           <a:p>
             <a:r>
               <a:rPr lang="en-US" dirty="0">
+                <a:hlinkClick r:id="rId1"/>
+              </a:rPr>
+              <a:t>https://blog.csdn.net/asukasmallriver/article/details/74356771</a:t>
+            </a:r>
+            <a:endParaRPr lang="en-US" dirty="0"/>
+          </a:p>
+          <a:p>
+            <a:r>
+              <a:rPr lang="en-US" dirty="0">
                 <a:hlinkClick r:id="rId2"/>
               </a:rPr>
-              <a:t>https://blog.csdn.net/asukasmallriver/article/details/74356771</a:t>
-            </a:r>
-            <a:endParaRPr lang="en-US" dirty="0"/>
+              <a:t>http://www.cnblogs.com/xiadw/p/7455513.html</a:t>
+            </a:r>
+            <a:endParaRPr lang="en-US" dirty="0"/>
+          </a:p>
+          <a:p>
+            <a:endParaRPr lang="en-US" dirty="0"/>
+          </a:p>
+          <a:p>
+            <a:endParaRPr lang="en-US" dirty="0"/>
+          </a:p>
+          <a:p>
+            <a:r>
+              <a:rPr lang="zh-CN" altLang="en-US" dirty="0"/>
+              <a:t>作业：</a:t>
+            </a:r>
+            <a:endParaRPr lang="en-US" altLang="zh-CN" dirty="0"/>
           </a:p>
           <a:p>
             <a:r>
               <a:rPr lang="en-US" dirty="0">
                 <a:hlinkClick r:id="rId3"/>
               </a:rPr>
-              <a:t>http://python.jobbole.com/80754/</a:t>
-            </a:r>
-            <a:endParaRPr lang="en-US" dirty="0"/>
-          </a:p>
-          <a:p>
-            <a:r>
-              <a:rPr lang="en-US" dirty="0">
-                <a:hlinkClick r:id="rId4"/>
-              </a:rPr>
-              <a:t>http://www.cnblogs.com/xiadw/p/7455513.html</a:t>
-            </a:r>
-            <a:endParaRPr lang="en-US" dirty="0"/>
-          </a:p>
-          <a:p>
-            <a:endParaRPr lang="en-US" dirty="0"/>
-          </a:p>
-          <a:p>
-            <a:endParaRPr lang="en-US" dirty="0"/>
-          </a:p>
-          <a:p>
-            <a:r>
-              <a:rPr lang="zh-CN" altLang="en-US" dirty="0"/>
-              <a:t>作业：</a:t>
-            </a:r>
-            <a:endParaRPr lang="en-US" altLang="zh-CN" dirty="0"/>
-          </a:p>
-          <a:p>
-            <a:r>
-              <a:rPr lang="en-US" dirty="0">
-                <a:hlinkClick r:id="rId5"/>
-              </a:rPr>
               <a:t>https://edu.cnblogs.com/campus/ntu/Embedded_Application/homework/2154</a:t>
             </a:r>
             <a:endParaRPr lang="en-US" dirty="0"/>
@@ -10130,11 +8871,6 @@
         </p:txBody>
       </p:sp>
     </p:spTree>
-    <p:extLst>
-      <p:ext uri="{BB962C8B-B14F-4D97-AF65-F5344CB8AC3E}">
-        <p14:creationId xmlns:p14="http://schemas.microsoft.com/office/powerpoint/2010/main" val="3658001604"/>
-      </p:ext>
-    </p:extLst>
   </p:cSld>
   <p:clrMapOvr>
     <a:masterClrMapping/>
@@ -10161,13 +8897,7 @@
       </p:grpSpPr>
       <p:sp>
         <p:nvSpPr>
-          <p:cNvPr id="2" name="Title 1">
-            <a:extLst>
-              <a:ext uri="{FF2B5EF4-FFF2-40B4-BE49-F238E27FC236}">
-                <a16:creationId xmlns:a16="http://schemas.microsoft.com/office/drawing/2014/main" id="{400A2DE7-47A0-4F20-9694-FDBF92C1CA35}"/>
-              </a:ext>
-            </a:extLst>
-          </p:cNvPr>
+          <p:cNvPr id="2" name="Title 1"/>
           <p:cNvSpPr>
             <a:spLocks noGrp="1"/>
           </p:cNvSpPr>
@@ -10196,13 +8926,7 @@
       </p:sp>
       <p:pic>
         <p:nvPicPr>
-          <p:cNvPr id="4" name="Content Placeholder 3">
-            <a:extLst>
-              <a:ext uri="{FF2B5EF4-FFF2-40B4-BE49-F238E27FC236}">
-                <a16:creationId xmlns:a16="http://schemas.microsoft.com/office/drawing/2014/main" id="{32760238-1EA2-49A3-9253-B9847E0F9086}"/>
-              </a:ext>
-            </a:extLst>
-          </p:cNvPr>
+          <p:cNvPr id="4" name="Content Placeholder 3"/>
           <p:cNvPicPr>
             <a:picLocks noGrp="1" noChangeAspect="1"/>
           </p:cNvPicPr>
@@ -10211,7 +8935,7 @@
           </p:nvPr>
         </p:nvPicPr>
         <p:blipFill>
-          <a:blip r:embed="rId2"/>
+          <a:blip r:embed="rId1"/>
           <a:stretch>
             <a:fillRect/>
           </a:stretch>
@@ -10227,11 +8951,6 @@
         </p:spPr>
       </p:pic>
     </p:spTree>
-    <p:extLst>
-      <p:ext uri="{BB962C8B-B14F-4D97-AF65-F5344CB8AC3E}">
-        <p14:creationId xmlns:p14="http://schemas.microsoft.com/office/powerpoint/2010/main" val="489024021"/>
-      </p:ext>
-    </p:extLst>
   </p:cSld>
   <p:clrMapOvr>
     <a:masterClrMapping/>
@@ -10258,13 +8977,7 @@
       </p:grpSpPr>
       <p:sp>
         <p:nvSpPr>
-          <p:cNvPr id="2" name="Title 1">
-            <a:extLst>
-              <a:ext uri="{FF2B5EF4-FFF2-40B4-BE49-F238E27FC236}">
-                <a16:creationId xmlns:a16="http://schemas.microsoft.com/office/drawing/2014/main" id="{AD08DCBC-EDDB-4DAF-87EF-58148CE82072}"/>
-              </a:ext>
-            </a:extLst>
-          </p:cNvPr>
+          <p:cNvPr id="2" name="Title 1"/>
           <p:cNvSpPr>
             <a:spLocks noGrp="1"/>
           </p:cNvSpPr>
@@ -10289,13 +9002,7 @@
       </p:sp>
       <p:pic>
         <p:nvPicPr>
-          <p:cNvPr id="4" name="Content Placeholder 3">
-            <a:extLst>
-              <a:ext uri="{FF2B5EF4-FFF2-40B4-BE49-F238E27FC236}">
-                <a16:creationId xmlns:a16="http://schemas.microsoft.com/office/drawing/2014/main" id="{FEC41A83-D234-47DB-9792-60B41F1B703A}"/>
-              </a:ext>
-            </a:extLst>
-          </p:cNvPr>
+          <p:cNvPr id="4" name="Content Placeholder 3"/>
           <p:cNvPicPr>
             <a:picLocks noGrp="1" noChangeAspect="1"/>
           </p:cNvPicPr>
@@ -10304,7 +9011,7 @@
           </p:nvPr>
         </p:nvPicPr>
         <p:blipFill>
-          <a:blip r:embed="rId2"/>
+          <a:blip r:embed="rId1"/>
           <a:stretch>
             <a:fillRect/>
           </a:stretch>
@@ -10320,11 +9027,6 @@
         </p:spPr>
       </p:pic>
     </p:spTree>
-    <p:extLst>
-      <p:ext uri="{BB962C8B-B14F-4D97-AF65-F5344CB8AC3E}">
-        <p14:creationId xmlns:p14="http://schemas.microsoft.com/office/powerpoint/2010/main" val="2964863537"/>
-      </p:ext>
-    </p:extLst>
   </p:cSld>
   <p:clrMapOvr>
     <a:masterClrMapping/>
@@ -10400,6 +9102,7 @@
               <a:rPr lang="zh-CN" altLang="en-US" dirty="0"/>
               <a:t>贯彻“做中学”的思想，动手实现下 面的项目，并和别人的成绩相比较，分析产生差距的原因。</a:t>
             </a:r>
+            <a:endParaRPr lang="zh-CN" altLang="en-US" dirty="0"/>
           </a:p>
           <a:p>
             <a:pPr lvl="1">
@@ -10497,7 +9200,7 @@
             </a:pPr>
             <a:r>
               <a:rPr lang="en-US" altLang="zh-CN" dirty="0">
-                <a:hlinkClick r:id="rId2"/>
+                <a:hlinkClick r:id="rId1"/>
               </a:rPr>
               <a:t>Word Counter</a:t>
             </a:r>
@@ -10511,7 +9214,7 @@
             </a:pPr>
             <a:r>
               <a:rPr lang="en-US" altLang="zh-CN" dirty="0">
-                <a:hlinkClick r:id="rId3"/>
+                <a:hlinkClick r:id="rId2"/>
               </a:rPr>
               <a:t>Word Frequency</a:t>
             </a:r>
@@ -10525,7 +9228,7 @@
             </a:pPr>
             <a:r>
               <a:rPr lang="zh-CN" altLang="en-US" dirty="0">
-                <a:hlinkClick r:id="rId4"/>
+                <a:hlinkClick r:id="rId3"/>
               </a:rPr>
               <a:t>四则运算</a:t>
             </a:r>
@@ -10534,11 +9237,6 @@
         </p:txBody>
       </p:sp>
     </p:spTree>
-    <p:extLst>
-      <p:ext uri="{BB962C8B-B14F-4D97-AF65-F5344CB8AC3E}">
-        <p14:creationId xmlns:p14="http://schemas.microsoft.com/office/powerpoint/2010/main" val="2157884989"/>
-      </p:ext>
-    </p:extLst>
   </p:cSld>
   <p:clrMapOvr>
     <a:masterClrMapping/>
@@ -10620,6 +9318,7 @@
               <a:rPr lang="zh-CN" altLang="en-US" dirty="0"/>
               <a:t>在软件工程课上的编程作业通常有三类： </a:t>
             </a:r>
+            <a:endParaRPr lang="zh-CN" altLang="en-US" dirty="0"/>
           </a:p>
           <a:p>
             <a:pPr lvl="1">
@@ -10639,6 +9338,7 @@
               <a:rPr lang="zh-CN" altLang="en-US" dirty="0"/>
               <a:t>语言的类的各种知识。这是学习编程语言的基础，不是软件工程作业。</a:t>
             </a:r>
+            <a:endParaRPr lang="zh-CN" altLang="en-US" dirty="0"/>
           </a:p>
           <a:p>
             <a:pPr lvl="1">
@@ -10650,6 +9350,7 @@
               <a:rPr lang="zh-CN" altLang="en-US" dirty="0"/>
               <a:t>练习某些算法或按某种模式处理数据， 例如：对输入数据进行排序处理，并输出。这是算法和数据结构的练习，不是软件工程作业。</a:t>
             </a:r>
+            <a:endParaRPr lang="zh-CN" altLang="en-US" dirty="0"/>
           </a:p>
           <a:p>
             <a:pPr lvl="1">
@@ -10696,7 +9397,7 @@
             <a:endParaRPr lang="en-US" altLang="zh-CN" b="1" dirty="0"/>
           </a:p>
           <a:p>
-            <a:pPr marL="118872" indent="0">
+            <a:pPr marL="118745" indent="0">
               <a:lnSpc>
                 <a:spcPct val="120000"/>
               </a:lnSpc>
@@ -10707,11 +9408,6 @@
         </p:txBody>
       </p:sp>
     </p:spTree>
-    <p:extLst>
-      <p:ext uri="{BB962C8B-B14F-4D97-AF65-F5344CB8AC3E}">
-        <p14:creationId xmlns:p14="http://schemas.microsoft.com/office/powerpoint/2010/main" val="860550191"/>
-      </p:ext>
-    </p:extLst>
   </p:cSld>
   <p:clrMapOvr>
     <a:masterClrMapping/>
@@ -10836,11 +9532,6 @@
         </p:txBody>
       </p:sp>
     </p:spTree>
-    <p:extLst>
-      <p:ext uri="{BB962C8B-B14F-4D97-AF65-F5344CB8AC3E}">
-        <p14:creationId xmlns:p14="http://schemas.microsoft.com/office/powerpoint/2010/main" val="560694357"/>
-      </p:ext>
-    </p:extLst>
   </p:cSld>
   <p:clrMapOvr>
     <a:masterClrMapping/>
@@ -10917,6 +9608,7 @@
               <a:rPr lang="zh-CN" altLang="en-US" dirty="0"/>
               <a:t>指出</a:t>
             </a:r>
+            <a:endParaRPr lang="zh-CN" altLang="en-US" dirty="0"/>
           </a:p>
           <a:p>
             <a:pPr lvl="1"/>
@@ -10943,6 +9635,7 @@
               <a:rPr lang="en-US" dirty="0"/>
               <a:t>Open-Close Principle， OCP）: </a:t>
             </a:r>
+            <a:endParaRPr lang="en-US" dirty="0"/>
           </a:p>
           <a:p>
             <a:pPr lvl="1"/>
@@ -10950,6 +9643,7 @@
               <a:rPr lang="zh-CN" altLang="en-US" dirty="0"/>
               <a:t>软件实体应该是可以扩展的，同时是不可修改的。</a:t>
             </a:r>
+            <a:endParaRPr lang="zh-CN" altLang="en-US" dirty="0"/>
           </a:p>
           <a:p>
             <a:pPr lvl="2"/>
@@ -10965,6 +9659,7 @@
               <a:rPr lang="zh-CN" altLang="en-US" dirty="0"/>
               <a:t>）。当应用的需求发生改变时，我们可以对模块进行扩 展，从而改变模块的功能。</a:t>
             </a:r>
+            <a:endParaRPr lang="zh-CN" altLang="en-US" dirty="0"/>
           </a:p>
           <a:p>
             <a:pPr lvl="2"/>
@@ -10980,6 +9675,7 @@
               <a:rPr lang="zh-CN" altLang="en-US" dirty="0"/>
               <a:t>对模块行为进行扩展时，不必改变模块的本身。 </a:t>
             </a:r>
+            <a:endParaRPr lang="zh-CN" altLang="en-US" dirty="0"/>
           </a:p>
           <a:p>
             <a:endParaRPr lang="en-US" dirty="0"/>
@@ -10987,11 +9683,6 @@
         </p:txBody>
       </p:sp>
     </p:spTree>
-    <p:extLst>
-      <p:ext uri="{BB962C8B-B14F-4D97-AF65-F5344CB8AC3E}">
-        <p14:creationId xmlns:p14="http://schemas.microsoft.com/office/powerpoint/2010/main" val="4243110794"/>
-      </p:ext>
-    </p:extLst>
   </p:cSld>
   <p:clrMapOvr>
     <a:masterClrMapping/>
@@ -11018,13 +9709,7 @@
       </p:grpSpPr>
       <p:sp>
         <p:nvSpPr>
-          <p:cNvPr id="2" name="Title 1">
-            <a:extLst>
-              <a:ext uri="{FF2B5EF4-FFF2-40B4-BE49-F238E27FC236}">
-                <a16:creationId xmlns:a16="http://schemas.microsoft.com/office/drawing/2014/main" id="{4E632AB6-302C-4E5B-B4AC-F040B3BB09C5}"/>
-              </a:ext>
-            </a:extLst>
-          </p:cNvPr>
+          <p:cNvPr id="2" name="Title 1"/>
           <p:cNvSpPr>
             <a:spLocks noGrp="1"/>
           </p:cNvSpPr>
@@ -11047,13 +9732,7 @@
       </p:sp>
       <p:sp>
         <p:nvSpPr>
-          <p:cNvPr id="3" name="Content Placeholder 2">
-            <a:extLst>
-              <a:ext uri="{FF2B5EF4-FFF2-40B4-BE49-F238E27FC236}">
-                <a16:creationId xmlns:a16="http://schemas.microsoft.com/office/drawing/2014/main" id="{319E3427-6C1F-4AC9-8493-B5E69D68178C}"/>
-              </a:ext>
-            </a:extLst>
-          </p:cNvPr>
+          <p:cNvPr id="3" name="Content Placeholder 2"/>
           <p:cNvSpPr>
             <a:spLocks noGrp="1"/>
           </p:cNvSpPr>
@@ -11072,6 +9751,7 @@
               <a:rPr lang="en-US" altLang="zh-CN" dirty="0"/>
               <a:t>C#</a:t>
             </a:r>
+            <a:endParaRPr lang="en-US" altLang="zh-CN" dirty="0"/>
           </a:p>
           <a:p>
             <a:pPr lvl="1"/>
@@ -11083,6 +9763,24 @@
               <a:rPr lang="en-US" altLang="zh-CN" dirty="0"/>
               <a:t>2.1.1</a:t>
             </a:r>
+            <a:endParaRPr lang="en-US" altLang="zh-CN" dirty="0"/>
+          </a:p>
+          <a:p>
+            <a:pPr lvl="1"/>
+            <a:r>
+              <a:rPr lang="en-US" altLang="zh-CN" dirty="0">
+                <a:hlinkClick r:id="rId1"/>
+              </a:rPr>
+              <a:t>http://www.cnblogs.com/xinz/archive/2011/11/20/2255830.html</a:t>
+            </a:r>
+            <a:endParaRPr lang="en-US" altLang="zh-CN" dirty="0"/>
+          </a:p>
+          <a:p>
+            <a:r>
+              <a:rPr lang="en-US" altLang="zh-CN" dirty="0"/>
+              <a:t>Java</a:t>
+            </a:r>
+            <a:endParaRPr lang="en-US" altLang="zh-CN" dirty="0"/>
           </a:p>
           <a:p>
             <a:pPr lvl="1"/>
@@ -11090,15 +9788,16 @@
               <a:rPr lang="en-US" altLang="zh-CN" dirty="0">
                 <a:hlinkClick r:id="rId2"/>
               </a:rPr>
-              <a:t>http://www.cnblogs.com/xinz/archive/2011/11/20/2255830.html</a:t>
+              <a:t>https://www.cnblogs.com/SivilTaram/p/software_pretraining_java.html</a:t>
             </a:r>
             <a:endParaRPr lang="en-US" altLang="zh-CN" dirty="0"/>
           </a:p>
           <a:p>
             <a:r>
               <a:rPr lang="en-US" altLang="zh-CN" dirty="0"/>
-              <a:t>Java</a:t>
-            </a:r>
+              <a:t>C++</a:t>
+            </a:r>
+            <a:endParaRPr lang="en-US" altLang="zh-CN" dirty="0"/>
           </a:p>
           <a:p>
             <a:pPr lvl="1"/>
@@ -11106,22 +9805,6 @@
               <a:rPr lang="en-US" altLang="zh-CN" dirty="0">
                 <a:hlinkClick r:id="rId3"/>
               </a:rPr>
-              <a:t>https://www.cnblogs.com/SivilTaram/p/software_pretraining_java.html</a:t>
-            </a:r>
-            <a:endParaRPr lang="en-US" altLang="zh-CN" dirty="0"/>
-          </a:p>
-          <a:p>
-            <a:r>
-              <a:rPr lang="en-US" altLang="zh-CN" dirty="0"/>
-              <a:t>C++</a:t>
-            </a:r>
-          </a:p>
-          <a:p>
-            <a:pPr lvl="1"/>
-            <a:r>
-              <a:rPr lang="en-US" altLang="zh-CN" dirty="0">
-                <a:hlinkClick r:id="rId4"/>
-              </a:rPr>
               <a:t>https://www.cnblogs.com/SivilTaram/p/software_pretraining_cpp.html</a:t>
             </a:r>
             <a:endParaRPr lang="en-US" altLang="zh-CN" dirty="0"/>
@@ -11138,11 +9821,6 @@
         </p:txBody>
       </p:sp>
     </p:spTree>
-    <p:extLst>
-      <p:ext uri="{BB962C8B-B14F-4D97-AF65-F5344CB8AC3E}">
-        <p14:creationId xmlns:p14="http://schemas.microsoft.com/office/powerpoint/2010/main" val="1069789591"/>
-      </p:ext>
-    </p:extLst>
   </p:cSld>
   <p:clrMapOvr>
     <a:masterClrMapping/>
@@ -11209,6 +9887,7 @@
               <a:rPr lang="zh-CN" altLang="en-US" dirty="0"/>
               <a:t>在什么情况下使用这些原则呢？ </a:t>
             </a:r>
+            <a:endParaRPr lang="zh-CN" altLang="en-US" dirty="0"/>
           </a:p>
           <a:p>
             <a:pPr lvl="1"/>
@@ -11224,6 +9903,7 @@
               <a:rPr lang="zh-CN" altLang="en-US" dirty="0"/>
               <a:t>，或者其他原则都是不明智的。</a:t>
             </a:r>
+            <a:endParaRPr lang="zh-CN" altLang="en-US" dirty="0"/>
           </a:p>
           <a:p>
             <a:pPr lvl="1"/>
@@ -11268,11 +9948,6 @@
         </p:txBody>
       </p:sp>
     </p:spTree>
-    <p:extLst>
-      <p:ext uri="{BB962C8B-B14F-4D97-AF65-F5344CB8AC3E}">
-        <p14:creationId xmlns:p14="http://schemas.microsoft.com/office/powerpoint/2010/main" val="544504135"/>
-      </p:ext>
-    </p:extLst>
   </p:cSld>
   <p:clrMapOvr>
     <a:masterClrMapping/>
@@ -11350,6 +10025,7 @@
               <a:rPr lang="zh-CN" altLang="en-US" dirty="0"/>
               <a:t>从数据方面扩展： </a:t>
             </a:r>
+            <a:endParaRPr lang="zh-CN" altLang="en-US" dirty="0"/>
           </a:p>
           <a:p>
             <a:pPr lvl="1">
@@ -11369,6 +10045,7 @@
               <a:rPr lang="zh-CN" altLang="en-US" dirty="0"/>
               <a:t>位的数字），这样引入大数的处理。</a:t>
             </a:r>
+            <a:endParaRPr lang="zh-CN" altLang="en-US" dirty="0"/>
           </a:p>
           <a:p>
             <a:pPr lvl="1">
@@ -11380,6 +10057,7 @@
               <a:rPr lang="zh-CN" altLang="en-US" dirty="0"/>
               <a:t>从数据的数量扩展，很多老师出题就假设数组只有六七个元素，直接写死在程序中。 如果这个数组有一万个、十万个元素呢？如果元素保存在文件里呢？ </a:t>
             </a:r>
+            <a:endParaRPr lang="zh-CN" altLang="en-US" dirty="0"/>
           </a:p>
           <a:p>
             <a:pPr lvl="1">
@@ -11391,6 +10069,7 @@
               <a:rPr lang="zh-CN" altLang="en-US" dirty="0"/>
               <a:t>从数据的维度扩展，如果数据是在多维数组中呢？ </a:t>
             </a:r>
+            <a:endParaRPr lang="zh-CN" altLang="en-US" dirty="0"/>
           </a:p>
           <a:p>
             <a:pPr lvl="1">
@@ -11402,15 +10081,11 @@
               <a:rPr lang="zh-CN" altLang="en-US" dirty="0"/>
               <a:t>从数据的其他属性扩展，例如，如果你的程序能处理北京的地铁数据，如何改进你的 程序，让它能动态处理上海或其他城市的数据呢？这样程序就要引入某种抽象来表示“地点”，而不是僵化地假设数据就是北京的。</a:t>
             </a:r>
+            <a:endParaRPr lang="zh-CN" altLang="en-US" dirty="0"/>
           </a:p>
         </p:txBody>
       </p:sp>
     </p:spTree>
-    <p:extLst>
-      <p:ext uri="{BB962C8B-B14F-4D97-AF65-F5344CB8AC3E}">
-        <p14:creationId xmlns:p14="http://schemas.microsoft.com/office/powerpoint/2010/main" val="2158645595"/>
-      </p:ext>
-    </p:extLst>
   </p:cSld>
   <p:clrMapOvr>
     <a:masterClrMapping/>
@@ -11496,6 +10171,7 @@
               <a:rPr lang="zh-CN" altLang="en-US" dirty="0"/>
               <a:t>很多程序的需求都是非常抽象，可以用数学公式描述和验证的，例如：“找出数组中的最大值”，然而实际需求的复杂度往往超过了数学公式的表达能力。请考虑下面几种扩展的方式： </a:t>
             </a:r>
+            <a:endParaRPr lang="zh-CN" altLang="en-US" dirty="0"/>
           </a:p>
           <a:p>
             <a:pPr lvl="1">
@@ -11507,6 +10183,7 @@
               <a:rPr lang="zh-CN" altLang="en-US" dirty="0"/>
               <a:t>不是仅仅要求结果，而是要让程序把计算的过程显示出来。请搜索各种“动画显示排 序过程”的资料，然后自己实现一下。</a:t>
             </a:r>
+            <a:endParaRPr lang="zh-CN" altLang="en-US" dirty="0"/>
           </a:p>
           <a:p>
             <a:pPr lvl="1">
@@ -11518,6 +10195,7 @@
               <a:rPr lang="zh-CN" altLang="en-US" dirty="0"/>
               <a:t>从需求的维度方面扩展，例如学生写了一个“统计程序有多少行” 的程序，我们可以 进一步要求，能把注释行、空行、只有一个字符的行去掉么？能处理目录里面的多个文件么？ </a:t>
             </a:r>
+            <a:endParaRPr lang="zh-CN" altLang="en-US" dirty="0"/>
           </a:p>
           <a:p>
             <a:pPr lvl="1">
@@ -11569,6 +10247,7 @@
               <a:rPr lang="zh-CN" altLang="en-US" dirty="0"/>
               <a:t>本书的记录，这是图书馆么？ </a:t>
             </a:r>
+            <a:endParaRPr lang="zh-CN" altLang="en-US" dirty="0"/>
           </a:p>
           <a:p>
             <a:pPr lvl="1">
@@ -11588,6 +10267,7 @@
               <a:rPr lang="zh-CN" altLang="en-US" dirty="0"/>
               <a:t>语法，支持无限的 “后悔”操作；让图书馆信息系统支持手机客户端。如果图形编辑器支持三种图形模板，现在引入五种新的模板，在这种情况下，程序员就会审视自己的设计是否能遵循一些设计原则，来高效率地满足需求。</a:t>
             </a:r>
+            <a:endParaRPr lang="zh-CN" altLang="en-US" dirty="0"/>
           </a:p>
           <a:p>
             <a:pPr lvl="1">
@@ -11599,15 +10279,11 @@
               <a:rPr lang="zh-CN" altLang="en-US" dirty="0"/>
               <a:t>探索创新的方式来满足已有的需求，或即将出现的需求。 </a:t>
             </a:r>
+            <a:endParaRPr lang="zh-CN" altLang="en-US" dirty="0"/>
           </a:p>
         </p:txBody>
       </p:sp>
     </p:spTree>
-    <p:extLst>
-      <p:ext uri="{BB962C8B-B14F-4D97-AF65-F5344CB8AC3E}">
-        <p14:creationId xmlns:p14="http://schemas.microsoft.com/office/powerpoint/2010/main" val="3599711863"/>
-      </p:ext>
-    </p:extLst>
   </p:cSld>
   <p:clrMapOvr>
     <a:masterClrMapping/>
@@ -11685,6 +10361,7 @@
               <a:rPr lang="zh-CN" altLang="en-US" dirty="0"/>
               <a:t>从用户方面扩展：绝大部分大作业都是单机运行，给一个用户（老师）看一次，看完就万事大吉。我们可以考虑下面的扩展方式： </a:t>
             </a:r>
+            <a:endParaRPr lang="zh-CN" altLang="en-US" dirty="0"/>
           </a:p>
           <a:p>
             <a:pPr lvl="1">
@@ -11696,6 +10373,7 @@
               <a:rPr lang="zh-CN" altLang="en-US" dirty="0"/>
               <a:t>单用户第二次使用这个软件的时候，能有什么功能，让单用户更喜欢这个软件？（例 如：记住上次的状态，自动展现上次文档最后编辑的地方，等等。） </a:t>
             </a:r>
+            <a:endParaRPr lang="zh-CN" altLang="en-US" dirty="0"/>
           </a:p>
           <a:p>
             <a:pPr lvl="1">
@@ -11723,6 +10401,7 @@
               <a:rPr lang="zh-CN" altLang="en-US" dirty="0"/>
               <a:t>？如何设计游戏的服务？ </a:t>
             </a:r>
+            <a:endParaRPr lang="zh-CN" altLang="en-US" dirty="0"/>
           </a:p>
           <a:p>
             <a:pPr lvl="1">
@@ -11734,6 +10413,7 @@
               <a:rPr lang="zh-CN" altLang="en-US" dirty="0"/>
               <a:t>用户从世界各地来，怎么办？你的“程序”能提供多种语言的界面么？ </a:t>
             </a:r>
+            <a:endParaRPr lang="zh-CN" altLang="en-US" dirty="0"/>
           </a:p>
           <a:p>
             <a:pPr lvl="1">
@@ -11745,15 +10425,11 @@
               <a:rPr lang="zh-CN" altLang="en-US" dirty="0"/>
               <a:t>用户有善意的和恶意的，如何让你的程序更安全？如何测试安全性？ </a:t>
             </a:r>
+            <a:endParaRPr lang="zh-CN" altLang="en-US" dirty="0"/>
           </a:p>
         </p:txBody>
       </p:sp>
     </p:spTree>
-    <p:extLst>
-      <p:ext uri="{BB962C8B-B14F-4D97-AF65-F5344CB8AC3E}">
-        <p14:creationId xmlns:p14="http://schemas.microsoft.com/office/powerpoint/2010/main" val="2204531274"/>
-      </p:ext>
-    </p:extLst>
   </p:cSld>
   <p:clrMapOvr>
     <a:masterClrMapping/>
@@ -11824,6 +10500,7 @@
               <a:rPr lang="zh-CN" altLang="en-US" dirty="0"/>
               <a:t>从软件构建方面扩展： </a:t>
             </a:r>
+            <a:endParaRPr lang="zh-CN" altLang="en-US" dirty="0"/>
           </a:p>
           <a:p>
             <a:pPr lvl="1"/>
@@ -11831,6 +10508,7 @@
               <a:rPr lang="zh-CN" altLang="en-US" dirty="0"/>
               <a:t>如果是把一个已有的软件从一个平台迁移到另一个平台，怎么办？ </a:t>
             </a:r>
+            <a:endParaRPr lang="zh-CN" altLang="en-US" dirty="0"/>
           </a:p>
           <a:p>
             <a:pPr lvl="1"/>
@@ -11846,6 +10524,7 @@
               <a:rPr lang="zh-CN" altLang="en-US" dirty="0"/>
               <a:t>） ？ </a:t>
             </a:r>
+            <a:endParaRPr lang="zh-CN" altLang="en-US" dirty="0"/>
           </a:p>
           <a:p>
             <a:pPr lvl="1"/>
@@ -11853,15 +10532,11 @@
               <a:rPr lang="zh-CN" altLang="en-US" dirty="0"/>
               <a:t>如果软件已经在服务中（例如图书馆信息系统），如何升级部分模块，同时尽量减少 系统下线的时间？ </a:t>
             </a:r>
+            <a:endParaRPr lang="zh-CN" altLang="en-US" dirty="0"/>
           </a:p>
         </p:txBody>
       </p:sp>
     </p:spTree>
-    <p:extLst>
-      <p:ext uri="{BB962C8B-B14F-4D97-AF65-F5344CB8AC3E}">
-        <p14:creationId xmlns:p14="http://schemas.microsoft.com/office/powerpoint/2010/main" val="2629546331"/>
-      </p:ext>
-    </p:extLst>
   </p:cSld>
   <p:clrMapOvr>
     <a:masterClrMapping/>
@@ -11888,13 +10563,7 @@
       </p:grpSpPr>
       <p:sp>
         <p:nvSpPr>
-          <p:cNvPr id="2" name="Title 1">
-            <a:extLst>
-              <a:ext uri="{FF2B5EF4-FFF2-40B4-BE49-F238E27FC236}">
-                <a16:creationId xmlns:a16="http://schemas.microsoft.com/office/drawing/2014/main" id="{6823FD1C-C9B8-4686-993C-09C907A9E5AE}"/>
-              </a:ext>
-            </a:extLst>
-          </p:cNvPr>
+          <p:cNvPr id="2" name="Title 1"/>
           <p:cNvSpPr>
             <a:spLocks noGrp="1"/>
           </p:cNvSpPr>
@@ -11917,13 +10586,7 @@
       </p:sp>
       <p:sp>
         <p:nvSpPr>
-          <p:cNvPr id="3" name="Content Placeholder 2">
-            <a:extLst>
-              <a:ext uri="{FF2B5EF4-FFF2-40B4-BE49-F238E27FC236}">
-                <a16:creationId xmlns:a16="http://schemas.microsoft.com/office/drawing/2014/main" id="{79F7FFF7-9B28-457C-92C6-76AE710E49E2}"/>
-              </a:ext>
-            </a:extLst>
-          </p:cNvPr>
+          <p:cNvPr id="3" name="Content Placeholder 2"/>
           <p:cNvSpPr>
             <a:spLocks noGrp="1"/>
           </p:cNvSpPr>
@@ -11938,13 +10601,14 @@
           </a:bodyPr>
           <a:lstStyle/>
           <a:p>
-            <a:pPr marL="118872" indent="0">
+            <a:pPr marL="118745" indent="0">
               <a:buNone/>
             </a:pPr>
             <a:r>
               <a:rPr lang="zh-CN" altLang="en-US" dirty="0"/>
               <a:t>通过锻炼过来，我们可以看出一个从实践出发的构建软件的步骤：</a:t>
             </a:r>
+            <a:endParaRPr lang="zh-CN" altLang="en-US" dirty="0"/>
           </a:p>
           <a:p>
             <a:pPr marL="925830" lvl="1" indent="-514350">
@@ -11959,6 +10623,7 @@
               <a:rPr lang="zh-CN" altLang="en-US" dirty="0"/>
               <a:t>先把最主要的情况处理对，程序能跑起来</a:t>
             </a:r>
+            <a:endParaRPr lang="zh-CN" altLang="en-US" dirty="0"/>
           </a:p>
           <a:p>
             <a:pPr marL="925830" lvl="1" indent="-514350">
@@ -11973,6 +10638,7 @@
               <a:rPr lang="zh-CN" altLang="en-US" dirty="0"/>
               <a:t>再把各种情况处理好</a:t>
             </a:r>
+            <a:endParaRPr lang="zh-CN" altLang="en-US" dirty="0"/>
           </a:p>
           <a:p>
             <a:pPr marL="925830" lvl="1" indent="-514350">
@@ -11987,6 +10653,7 @@
               <a:rPr lang="zh-CN" altLang="en-US" dirty="0"/>
               <a:t>优化速度</a:t>
             </a:r>
+            <a:endParaRPr lang="zh-CN" altLang="en-US" dirty="0"/>
           </a:p>
           <a:p>
             <a:pPr marL="925830" lvl="1" indent="-514350">
@@ -12001,6 +10668,7 @@
               <a:rPr lang="zh-CN" altLang="en-US" dirty="0"/>
               <a:t>让程序可扩展，既然能处理这个问题，我们让它处理一些扩展问题如何？</a:t>
             </a:r>
+            <a:endParaRPr lang="zh-CN" altLang="en-US" dirty="0"/>
           </a:p>
           <a:p>
             <a:pPr marL="925830" lvl="1" indent="-514350">
@@ -12015,6 +10683,7 @@
               <a:rPr lang="zh-CN" altLang="en-US" dirty="0"/>
               <a:t>让程序可读，可维护。</a:t>
             </a:r>
+            <a:endParaRPr lang="zh-CN" altLang="en-US" dirty="0"/>
           </a:p>
           <a:p>
             <a:pPr marL="925830" lvl="1" indent="-514350">
@@ -12026,11 +10695,6 @@
         </p:txBody>
       </p:sp>
     </p:spTree>
-    <p:extLst>
-      <p:ext uri="{BB962C8B-B14F-4D97-AF65-F5344CB8AC3E}">
-        <p14:creationId xmlns:p14="http://schemas.microsoft.com/office/powerpoint/2010/main" val="3835943848"/>
-      </p:ext>
-    </p:extLst>
   </p:cSld>
   <p:clrMapOvr>
     <a:masterClrMapping/>
@@ -12168,7 +10832,7 @@
             <a:endParaRPr lang="en-US" altLang="zh-CN" dirty="0"/>
           </a:p>
           <a:p>
-            <a:pPr marL="678942" indent="-514350"/>
+            <a:pPr marL="678815" indent="-514350"/>
             <a:r>
               <a:rPr lang="zh-CN" altLang="en-US" dirty="0"/>
               <a:t>还可以从单元测试开始</a:t>
@@ -12186,11 +10850,6 @@
         </p:txBody>
       </p:sp>
     </p:spTree>
-    <p:extLst>
-      <p:ext uri="{BB962C8B-B14F-4D97-AF65-F5344CB8AC3E}">
-        <p14:creationId xmlns:p14="http://schemas.microsoft.com/office/powerpoint/2010/main" val="2335214187"/>
-      </p:ext>
-    </p:extLst>
   </p:cSld>
   <p:clrMapOvr>
     <a:masterClrMapping/>
@@ -12217,13 +10876,7 @@
       </p:grpSpPr>
       <p:sp>
         <p:nvSpPr>
-          <p:cNvPr id="2" name="Title 1">
-            <a:extLst>
-              <a:ext uri="{FF2B5EF4-FFF2-40B4-BE49-F238E27FC236}">
-                <a16:creationId xmlns:a16="http://schemas.microsoft.com/office/drawing/2014/main" id="{24577D88-E090-464B-BC87-D60EE9128A0F}"/>
-              </a:ext>
-            </a:extLst>
-          </p:cNvPr>
+          <p:cNvPr id="2" name="Title 1"/>
           <p:cNvSpPr>
             <a:spLocks noGrp="1"/>
           </p:cNvSpPr>
@@ -12240,18 +10893,13 @@
               <a:rPr lang="en-US" dirty="0"/>
               <a:t>appendix</a:t>
             </a:r>
-          </a:p>
-        </p:txBody>
-      </p:sp>
-      <p:sp>
-        <p:nvSpPr>
-          <p:cNvPr id="3" name="Content Placeholder 2">
-            <a:extLst>
-              <a:ext uri="{FF2B5EF4-FFF2-40B4-BE49-F238E27FC236}">
-                <a16:creationId xmlns:a16="http://schemas.microsoft.com/office/drawing/2014/main" id="{3402149D-B9D8-49F7-8135-09433B6F86C7}"/>
-              </a:ext>
-            </a:extLst>
-          </p:cNvPr>
+            <a:endParaRPr lang="en-US" dirty="0"/>
+          </a:p>
+        </p:txBody>
+      </p:sp>
+      <p:sp>
+        <p:nvSpPr>
+          <p:cNvPr id="3" name="Content Placeholder 2"/>
           <p:cNvSpPr>
             <a:spLocks noGrp="1"/>
           </p:cNvSpPr>
@@ -12269,11 +10917,6 @@
         </p:txBody>
       </p:sp>
     </p:spTree>
-    <p:extLst>
-      <p:ext uri="{BB962C8B-B14F-4D97-AF65-F5344CB8AC3E}">
-        <p14:creationId xmlns:p14="http://schemas.microsoft.com/office/powerpoint/2010/main" val="161325156"/>
-      </p:ext>
-    </p:extLst>
   </p:cSld>
   <p:clrMapOvr>
     <a:masterClrMapping/>
@@ -12386,13 +11029,7 @@
           <p:cNvGraphicFramePr>
             <a:graphicFrameLocks noGrp="1"/>
           </p:cNvGraphicFramePr>
-          <p:nvPr>
-            <p:extLst>
-              <p:ext uri="{D42A27DB-BD31-4B8C-83A1-F6EECF244321}">
-                <p14:modId xmlns:p14="http://schemas.microsoft.com/office/powerpoint/2010/main" val="1782775673"/>
-              </p:ext>
-            </p:extLst>
-          </p:nvPr>
+          <p:nvPr/>
         </p:nvGraphicFramePr>
         <p:xfrm>
           <a:off x="2667000" y="3962400"/>
@@ -12405,20 +11042,8 @@
                 <a:tableStyleId>{5C22544A-7EE6-4342-B048-85BDC9FD1C3A}</a:tableStyleId>
               </a:tblPr>
               <a:tblGrid>
-                <a:gridCol w="3048000">
-                  <a:extLst>
-                    <a:ext uri="{9D8B030D-6E8A-4147-A177-3AD203B41FA5}">
-                      <a16:colId xmlns:a16="http://schemas.microsoft.com/office/drawing/2014/main" val="174651531"/>
-                    </a:ext>
-                  </a:extLst>
-                </a:gridCol>
-                <a:gridCol w="3048000">
-                  <a:extLst>
-                    <a:ext uri="{9D8B030D-6E8A-4147-A177-3AD203B41FA5}">
-                      <a16:colId xmlns:a16="http://schemas.microsoft.com/office/drawing/2014/main" val="3934896311"/>
-                    </a:ext>
-                  </a:extLst>
-                </a:gridCol>
+                <a:gridCol w="3048000"/>
+                <a:gridCol w="3048000"/>
               </a:tblGrid>
               <a:tr h="386080">
                 <a:tc>
@@ -12449,11 +11074,6 @@
                   </a:txBody>
                   <a:tcPr/>
                 </a:tc>
-                <a:extLst>
-                  <a:ext uri="{0D108BD9-81ED-4DB2-BD59-A6C34878D82A}">
-                    <a16:rowId xmlns:a16="http://schemas.microsoft.com/office/drawing/2014/main" val="924965001"/>
-                  </a:ext>
-                </a:extLst>
               </a:tr>
               <a:tr h="386080">
                 <a:tc>
@@ -12483,15 +11103,11 @@
                         <a:rPr lang="en-US" dirty="0"/>
                         <a:t>5</a:t>
                       </a:r>
+                      <a:endParaRPr lang="en-US" dirty="0"/>
                     </a:p>
                   </a:txBody>
                   <a:tcPr/>
                 </a:tc>
-                <a:extLst>
-                  <a:ext uri="{0D108BD9-81ED-4DB2-BD59-A6C34878D82A}">
-                    <a16:rowId xmlns:a16="http://schemas.microsoft.com/office/drawing/2014/main" val="4129477549"/>
-                  </a:ext>
-                </a:extLst>
               </a:tr>
               <a:tr h="386080">
                 <a:tc>
@@ -12521,15 +11137,11 @@
                         <a:rPr lang="en-US" dirty="0"/>
                         <a:t>3</a:t>
                       </a:r>
+                      <a:endParaRPr lang="en-US" dirty="0"/>
                     </a:p>
                   </a:txBody>
                   <a:tcPr/>
                 </a:tc>
-                <a:extLst>
-                  <a:ext uri="{0D108BD9-81ED-4DB2-BD59-A6C34878D82A}">
-                    <a16:rowId xmlns:a16="http://schemas.microsoft.com/office/drawing/2014/main" val="1176689631"/>
-                  </a:ext>
-                </a:extLst>
               </a:tr>
               <a:tr h="386080">
                 <a:tc>
@@ -12541,6 +11153,7 @@
                         <a:rPr lang="en-US" dirty="0"/>
                         <a:t>[-1, 20, -5, 30, -4]</a:t>
                       </a:r>
+                      <a:endParaRPr lang="en-US" dirty="0"/>
                     </a:p>
                   </a:txBody>
                   <a:tcPr/>
@@ -12554,15 +11167,11 @@
                         <a:rPr lang="en-US" dirty="0"/>
                         <a:t>45</a:t>
                       </a:r>
+                      <a:endParaRPr lang="en-US" dirty="0"/>
                     </a:p>
                   </a:txBody>
                   <a:tcPr/>
                 </a:tc>
-                <a:extLst>
-                  <a:ext uri="{0D108BD9-81ED-4DB2-BD59-A6C34878D82A}">
-                    <a16:rowId xmlns:a16="http://schemas.microsoft.com/office/drawing/2014/main" val="1222233807"/>
-                  </a:ext>
-                </a:extLst>
               </a:tr>
               <a:tr h="386080">
                 <a:tc>
@@ -12592,26 +11201,17 @@
                         <a:rPr lang="en-US" dirty="0"/>
                         <a:t>-1</a:t>
                       </a:r>
+                      <a:endParaRPr lang="en-US" dirty="0"/>
                     </a:p>
                   </a:txBody>
                   <a:tcPr/>
                 </a:tc>
-                <a:extLst>
-                  <a:ext uri="{0D108BD9-81ED-4DB2-BD59-A6C34878D82A}">
-                    <a16:rowId xmlns:a16="http://schemas.microsoft.com/office/drawing/2014/main" val="1829120350"/>
-                  </a:ext>
-                </a:extLst>
               </a:tr>
             </a:tbl>
           </a:graphicData>
         </a:graphic>
       </p:graphicFrame>
     </p:spTree>
-    <p:extLst>
-      <p:ext uri="{BB962C8B-B14F-4D97-AF65-F5344CB8AC3E}">
-        <p14:creationId xmlns:p14="http://schemas.microsoft.com/office/powerpoint/2010/main" val="3087338762"/>
-      </p:ext>
-    </p:extLst>
   </p:cSld>
   <p:clrMapOvr>
     <a:masterClrMapping/>
@@ -12742,6 +11342,7 @@
               <a:rPr lang="en-US" sz="2400" dirty="0"/>
               <a:t>-32, -10, 33, -23, 32, -12, 41, -12, 1, 3, 5, -98, 70, -21, 10, -9, 61</a:t>
             </a:r>
+            <a:endParaRPr lang="en-US" sz="2400" dirty="0"/>
           </a:p>
           <a:p>
             <a:pPr lvl="1"/>
@@ -12775,6 +11376,7 @@
               <a:rPr lang="en-US" sz="2000" dirty="0"/>
               <a:t>O(N^3)</a:t>
             </a:r>
+            <a:endParaRPr lang="en-US" sz="2000" dirty="0"/>
           </a:p>
           <a:p>
             <a:pPr lvl="1"/>
@@ -12782,6 +11384,7 @@
               <a:rPr lang="en-US" sz="2000" dirty="0"/>
               <a:t>O(N^2)</a:t>
             </a:r>
+            <a:endParaRPr lang="en-US" sz="2000" dirty="0"/>
           </a:p>
           <a:p>
             <a:pPr lvl="1"/>
@@ -12789,15 +11392,11 @@
               <a:rPr lang="en-US" sz="2000" dirty="0"/>
               <a:t>O(N)</a:t>
             </a:r>
+            <a:endParaRPr lang="en-US" sz="2000" dirty="0"/>
           </a:p>
         </p:txBody>
       </p:sp>
     </p:spTree>
-    <p:extLst>
-      <p:ext uri="{BB962C8B-B14F-4D97-AF65-F5344CB8AC3E}">
-        <p14:creationId xmlns:p14="http://schemas.microsoft.com/office/powerpoint/2010/main" val="764867859"/>
-      </p:ext>
-    </p:extLst>
   </p:cSld>
   <p:clrMapOvr>
     <a:masterClrMapping/>
@@ -12892,7 +11491,7 @@
             <a:endParaRPr lang="en-US" altLang="zh-CN" dirty="0"/>
           </a:p>
           <a:p>
-            <a:pPr marL="633222" indent="-514350">
+            <a:pPr marL="633095" indent="-514350">
               <a:lnSpc>
                 <a:spcPct val="120000"/>
               </a:lnSpc>
@@ -12906,7 +11505,7 @@
             <a:endParaRPr lang="en-US" altLang="zh-CN" dirty="0"/>
           </a:p>
           <a:p>
-            <a:pPr marL="633222" indent="-514350">
+            <a:pPr marL="633095" indent="-514350">
               <a:lnSpc>
                 <a:spcPct val="120000"/>
               </a:lnSpc>
@@ -12920,7 +11519,7 @@
             <a:endParaRPr lang="en-US" altLang="zh-CN" dirty="0"/>
           </a:p>
           <a:p>
-            <a:pPr marL="633222" indent="-514350">
+            <a:pPr marL="633095" indent="-514350">
               <a:lnSpc>
                 <a:spcPct val="120000"/>
               </a:lnSpc>
@@ -12934,7 +11533,7 @@
             <a:endParaRPr lang="en-US" altLang="zh-CN" dirty="0"/>
           </a:p>
           <a:p>
-            <a:pPr marL="118872" indent="0">
+            <a:pPr marL="118745" indent="0">
               <a:lnSpc>
                 <a:spcPct val="120000"/>
               </a:lnSpc>
@@ -12943,7 +11542,7 @@
             <a:endParaRPr lang="en-US" altLang="zh-CN" dirty="0"/>
           </a:p>
           <a:p>
-            <a:pPr marL="118872" indent="0">
+            <a:pPr marL="118745" indent="0">
               <a:lnSpc>
                 <a:spcPct val="120000"/>
               </a:lnSpc>
@@ -12957,6 +11556,7 @@
               <a:rPr lang="en-US" altLang="zh-CN" dirty="0"/>
               <a:t>Class</a:t>
             </a:r>
+            <a:endParaRPr lang="en-US" altLang="zh-CN" dirty="0"/>
           </a:p>
           <a:p>
             <a:pPr>
@@ -12974,6 +11574,7 @@
               <a:rPr lang="en-US" altLang="zh-CN" dirty="0"/>
               <a:t>MSA (Maximum Sub-array Sum)</a:t>
             </a:r>
+            <a:endParaRPr lang="en-US" altLang="zh-CN" dirty="0"/>
           </a:p>
           <a:p>
             <a:pPr>
@@ -13009,6 +11610,7 @@
               <a:rPr lang="en-US" altLang="zh-CN" dirty="0"/>
               <a:t>()</a:t>
             </a:r>
+            <a:endParaRPr lang="en-US" altLang="zh-CN" dirty="0"/>
           </a:p>
           <a:p>
             <a:pPr>
@@ -13058,6 +11660,7 @@
               <a:rPr lang="en-US" altLang="zh-CN" dirty="0"/>
               <a:t> </a:t>
             </a:r>
+            <a:endParaRPr lang="en-US" altLang="zh-CN" dirty="0"/>
           </a:p>
         </p:txBody>
       </p:sp>
@@ -13159,6 +11762,7 @@
               <a:rPr lang="en-US" sz="2400" dirty="0"/>
               <a:t>	int[] test1 = { 1, -2, 3, 5, -3, 6, 1, -1 };</a:t>
             </a:r>
+            <a:endParaRPr lang="en-US" sz="2400" dirty="0"/>
           </a:p>
           <a:p>
             <a:pPr>
@@ -13177,6 +11781,7 @@
               <a:rPr lang="en-US" sz="2400" dirty="0"/>
               <a:t>(test1, 8);</a:t>
             </a:r>
+            <a:endParaRPr lang="en-US" sz="2400" dirty="0"/>
           </a:p>
           <a:p>
             <a:pPr>
@@ -13203,6 +11808,7 @@
               <a:rPr lang="en-US" sz="2400" dirty="0"/>
               <a:t> == 12);</a:t>
             </a:r>
+            <a:endParaRPr lang="en-US" sz="2400" dirty="0"/>
           </a:p>
           <a:p>
             <a:pPr>
@@ -13229,6 +11835,7 @@
               <a:rPr lang="en-US" sz="2400" dirty="0"/>
               <a:t> == 2);</a:t>
             </a:r>
+            <a:endParaRPr lang="en-US" sz="2400" dirty="0"/>
           </a:p>
           <a:p>
             <a:pPr>
@@ -13255,6 +11862,7 @@
               <a:rPr lang="en-US" sz="2400" dirty="0"/>
               <a:t> == 6);</a:t>
             </a:r>
+            <a:endParaRPr lang="en-US" sz="2400" dirty="0"/>
           </a:p>
           <a:p>
             <a:pPr>
@@ -13397,6 +12005,7 @@
               <a:rPr lang="en-US" dirty="0"/>
               <a:t> class</a:t>
             </a:r>
+            <a:endParaRPr lang="en-US" dirty="0"/>
           </a:p>
           <a:p>
             <a:r>
@@ -13407,6 +12016,7 @@
               <a:rPr lang="en-US" altLang="zh-CN" dirty="0"/>
               <a:t>0. </a:t>
             </a:r>
+            <a:endParaRPr lang="en-US" altLang="zh-CN" dirty="0"/>
           </a:p>
           <a:p>
             <a:r>
@@ -13485,7 +12095,7 @@
             </a:r>
             <a:r>
               <a:rPr lang="en-US" dirty="0" err="1">
-                <a:hlinkClick r:id="rId2"/>
+                <a:hlinkClick r:id="rId1"/>
               </a:rPr>
               <a:t>OpenCppCoverage</a:t>
             </a:r>
@@ -13587,11 +12197,6 @@
         </p:txBody>
       </p:sp>
     </p:spTree>
-    <p:extLst>
-      <p:ext uri="{BB962C8B-B14F-4D97-AF65-F5344CB8AC3E}">
-        <p14:creationId xmlns:p14="http://schemas.microsoft.com/office/powerpoint/2010/main" val="4070175085"/>
-      </p:ext>
-    </p:extLst>
   </p:cSld>
   <p:clrMapOvr>
     <a:masterClrMapping/>
@@ -13790,11 +12395,9 @@
       </a:bgFillStyleLst>
     </a:fmtScheme>
   </a:themeElements>
-  <a:objectDefaults/>
-  <a:extraClrSchemeLst/>
   <a:extLst>
     <a:ext uri="{05A4C25C-085E-4340-85A3-A5531E510DB2}">
-      <thm15:themeFamily xmlns:thm15="http://schemas.microsoft.com/office/thememl/2012/main" name="Depth" id="{7BEAFC2A-325C-49C4-AC08-2B765DA903F9}" vid="{1735E755-43E6-43AA-ABA2-C989ECC79AF5}"/>
+      <thm15:themeFamily xmlns:thm15="http://schemas.microsoft.com/office/thememl/2012/main" name="Office Theme" id="{62F939B6-93AF-4DB8-9C6B-D6C7DFDC589F}" vid="{4A3C46E8-61CC-4603-A589-7422A47A8E4A}"/>
     </a:ext>
   </a:extLst>
 </a:theme>
@@ -14078,8 +12681,11 @@
       </a:bgFillStyleLst>
     </a:fmtScheme>
   </a:themeElements>
-  <a:objectDefaults/>
-  <a:extraClrSchemeLst/>
+  <a:extLst>
+    <a:ext uri="{05A4C25C-085E-4340-85A3-A5531E510DB2}">
+      <thm15:themeFamily xmlns:thm15="http://schemas.microsoft.com/office/thememl/2012/main" name="Office Theme" id="{62F939B6-93AF-4DB8-9C6B-D6C7DFDC589F}" vid="{4A3C46E8-61CC-4603-A589-7422A47A8E4A}"/>
+    </a:ext>
+  </a:extLst>
 </a:theme>
 </file>
 
@@ -14214,33 +12820,18 @@
 
 <file path=customXml/itemProps1.xml><?xml version="1.0" encoding="utf-8"?>
 <ds:datastoreItem xmlns:ds="http://schemas.openxmlformats.org/officeDocument/2006/customXml" ds:itemID="{9C8CAA89-9E7D-41B1-950A-6DF122C82EDA}">
-  <ds:schemaRefs>
-    <ds:schemaRef ds:uri="http://schemas.microsoft.com/office/2006/metadata/contentType"/>
-    <ds:schemaRef ds:uri="http://schemas.microsoft.com/office/2006/metadata/properties/metaAttributes"/>
-    <ds:schemaRef ds:uri="http://www.w3.org/2001/XMLSchema"/>
-    <ds:schemaRef ds:uri="http://schemas.microsoft.com/office/2006/metadata/properties"/>
-    <ds:schemaRef ds:uri="http://schemas.openxmlformats.org/package/2006/metadata/core-properties"/>
-    <ds:schemaRef ds:uri="http://purl.org/dc/elements/1.1/"/>
-    <ds:schemaRef ds:uri="http://purl.org/dc/terms/"/>
-    <ds:schemaRef ds:uri="http://schemas.microsoft.com/internal/obd"/>
-    <ds:schemaRef ds:uri="http://schemas.microsoft.com/office/infopath/2007/PartnerControls"/>
-  </ds:schemaRefs>
+  <ds:schemaRefs/>
 </ds:datastoreItem>
 </file>
 
 <file path=customXml/itemProps2.xml><?xml version="1.0" encoding="utf-8"?>
 <ds:datastoreItem xmlns:ds="http://schemas.openxmlformats.org/officeDocument/2006/customXml" ds:itemID="{C71B05AC-F93F-450E-A081-0013EA37D8F1}">
-  <ds:schemaRefs>
-    <ds:schemaRef ds:uri="http://schemas.microsoft.com/office/2006/metadata/properties"/>
-    <ds:schemaRef ds:uri="http://schemas.microsoft.com/office/infopath/2007/PartnerControls"/>
-  </ds:schemaRefs>
+  <ds:schemaRefs/>
 </ds:datastoreItem>
 </file>
 
 <file path=customXml/itemProps3.xml><?xml version="1.0" encoding="utf-8"?>
 <ds:datastoreItem xmlns:ds="http://schemas.openxmlformats.org/officeDocument/2006/customXml" ds:itemID="{AC836C2F-A27F-4DFC-B2E2-99E8491CE789}">
-  <ds:schemaRefs>
-    <ds:schemaRef ds:uri="http://schemas.microsoft.com/sharepoint/v3/contenttype/forms"/>
-  </ds:schemaRefs>
+  <ds:schemaRefs/>
 </ds:datastoreItem>
 </file>